--- a/public/fun/pack/pptx/review/보장점검양식_45_사업장점검_한지등.pptx
+++ b/public/fun/pack/pptx/review/보장점검양식_45_사업장점검_한지등.pptx
@@ -3286,6 +3286,14 @@
 <file path=ppt/slides/slide1.xml><?xml version="1.0" encoding="utf-8"?>
 <p:sld xmlns:a="http://schemas.openxmlformats.org/drawingml/2006/main" xmlns:p="http://schemas.openxmlformats.org/presentationml/2006/main" xmlns:r="http://schemas.openxmlformats.org/officeDocument/2006/relationships">
   <p:cSld>
+    <p:bg>
+      <p:bgPr>
+        <a:solidFill>
+          <a:srgbClr val="F6EAD5"/>
+        </a:solidFill>
+        <a:effectLst/>
+      </p:bgPr>
+    </p:bg>
     <p:spTree>
       <p:nvGrpSpPr>
         <p:cNvPr id="1" name=""/>
@@ -3293,30 +3301,102 @@
         <p:nvPr/>
       </p:nvGrpSpPr>
       <p:grpSpPr/>
-      <p:pic>
-        <p:nvPicPr>
-          <p:cNvPr id="3" name="표지 그림" descr="review-45.jpg"/>
-          <p:cNvPicPr>
-            <a:picLocks noChangeAspect="1"/>
-          </p:cNvPicPr>
+      <p:sp>
+        <p:nvSpPr>
+          <p:cNvPr id="3" name="장식"/>
+          <p:cNvSpPr/>
           <p:nvPr/>
-        </p:nvPicPr>
-        <p:blipFill>
-          <a:blip r:embed="rId2"/>
-          <a:stretch>
-            <a:fillRect/>
-          </a:stretch>
-        </p:blipFill>
-        <p:spPr>
-          <a:xfrm>
-            <a:off x="0" y="0"/>
-            <a:ext cx="12191695" cy="6858000"/>
+        </p:nvSpPr>
+        <p:spPr>
+          <a:xfrm>
+            <a:off x="7802684" y="0"/>
+            <a:ext cx="4389010" cy="6858000"/>
           </a:xfrm>
           <a:prstGeom prst="rect">
             <a:avLst/>
           </a:prstGeom>
-        </p:spPr>
-      </p:pic>
+          <a:solidFill>
+            <a:srgbClr val="FFFFFF"/>
+          </a:solidFill>
+          <a:ln>
+            <a:noFill/>
+          </a:ln>
+        </p:spPr>
+        <p:txBody>
+          <a:bodyPr rtlCol="0" anchor="ctr"/>
+          <a:lstStyle/>
+          <a:p>
+            <a:pPr algn="ctr"/>
+          </a:p>
+        </p:txBody>
+      </p:sp>
+      <p:sp>
+        <p:nvSpPr>
+          <p:cNvPr id="4" name="장식"/>
+          <p:cNvSpPr/>
+          <p:nvPr/>
+        </p:nvSpPr>
+        <p:spPr>
+          <a:xfrm>
+            <a:off x="8168435" y="365760"/>
+            <a:ext cx="3657508" cy="6126480"/>
+          </a:xfrm>
+          <a:prstGeom prst="rect">
+            <a:avLst/>
+          </a:prstGeom>
+          <a:noFill/>
+          <a:ln w="9525">
+            <a:solidFill>
+              <a:srgbClr val="26231F"/>
+            </a:solidFill>
+          </a:ln>
+        </p:spPr>
+        <p:txBody>
+          <a:bodyPr rtlCol="0" anchor="ctr"/>
+          <a:lstStyle/>
+          <a:p>
+            <a:pPr algn="ctr"/>
+          </a:p>
+        </p:txBody>
+      </p:sp>
+      <p:sp>
+        <p:nvSpPr>
+          <p:cNvPr id="5" name="라벨"/>
+          <p:cNvSpPr txBox="1"/>
+          <p:nvPr/>
+        </p:nvSpPr>
+        <p:spPr>
+          <a:xfrm>
+            <a:off x="822960" y="2148840"/>
+            <a:ext cx="5608179" cy="274320"/>
+          </a:xfrm>
+          <a:prstGeom prst="rect">
+            <a:avLst/>
+          </a:prstGeom>
+          <a:noFill/>
+        </p:spPr>
+        <p:txBody>
+          <a:bodyPr wrap="square" lIns="54864" rIns="54864" tIns="27432" bIns="27432" anchor="t">
+            <a:noAutofit/>
+          </a:bodyPr>
+          <a:lstStyle/>
+          <a:p>
+            <a:pPr algn="l">
+              <a:lnSpc>
+                <a:spcPct val="115000"/>
+              </a:lnSpc>
+            </a:pPr>
+            <a:r>
+              <a:rPr sz="1000" b="1" i="0" spc="250">
+                <a:solidFill>
+                  <a:srgbClr val="26231F"/>
+                </a:solidFill>
+              </a:rPr>
+              <a:t>INSURANCE CHECK</a:t>
+            </a:r>
+          </a:p>
+        </p:txBody>
+      </p:sp>
       <p:sp>
         <p:nvSpPr>
           <p:cNvPr id="2" name="Title 1"/>
@@ -3329,8 +3409,8 @@
         </p:nvSpPr>
         <p:spPr>
           <a:xfrm>
-            <a:off x="853418" y="2057400"/>
-            <a:ext cx="6095847" cy="1554480"/>
+            <a:off x="822960" y="2606040"/>
+            <a:ext cx="5608179" cy="1188720"/>
           </a:xfrm>
         </p:spPr>
         <p:txBody>
@@ -3347,7 +3427,7 @@
             <a:r>
               <a:rPr sz="3600" b="1" i="0">
                 <a:solidFill>
-                  <a:srgbClr val="7C5D27"/>
+                  <a:srgbClr val="26231F"/>
                 </a:solidFill>
               </a:rPr>
               <a:t>우리 보험 점검 시간</a:t>
@@ -3357,14 +3437,14 @@
       </p:sp>
       <p:sp>
         <p:nvSpPr>
-          <p:cNvPr id="4" name="한 줄 문구"/>
+          <p:cNvPr id="6" name="한 줄 문구"/>
           <p:cNvSpPr txBox="1"/>
           <p:nvPr/>
         </p:nvSpPr>
         <p:spPr>
           <a:xfrm>
-            <a:off x="853418" y="3749039"/>
-            <a:ext cx="6095847" cy="822960"/>
+            <a:off x="822960" y="3886200"/>
+            <a:ext cx="5608179" cy="822960"/>
           </a:xfrm>
           <a:prstGeom prst="rect">
             <a:avLst/>
@@ -3383,26 +3463,26 @@
               </a:lnSpc>
             </a:pPr>
             <a:r>
-              <a:rPr sz="1700" b="0" i="1">
+              <a:rPr sz="1700" b="0" i="0">
                 <a:solidFill>
-                  <a:srgbClr val="7C5D27"/>
+                  <a:srgbClr val="26231F"/>
                 </a:solidFill>
               </a:rPr>
-              <a:t>연말정산 전에 서류를 모읍니다</a:t>
+              <a:t>정산 전에 서류를 모읍니다</a:t>
             </a:r>
           </a:p>
         </p:txBody>
       </p:sp>
       <p:sp>
         <p:nvSpPr>
-          <p:cNvPr id="5" name="안내 문구"/>
+          <p:cNvPr id="7" name="안내 문구"/>
           <p:cNvSpPr txBox="1"/>
           <p:nvPr/>
         </p:nvSpPr>
         <p:spPr>
           <a:xfrm>
-            <a:off x="853418" y="4617720"/>
-            <a:ext cx="6095847" cy="914400"/>
+            <a:off x="822960" y="4754880"/>
+            <a:ext cx="5608179" cy="914400"/>
           </a:xfrm>
           <a:prstGeom prst="rect">
             <a:avLst/>
@@ -3423,10 +3503,10 @@
             <a:r>
               <a:rPr sz="1400" b="0" i="0">
                 <a:solidFill>
-                  <a:srgbClr val="666666"/>
+                  <a:srgbClr val="26231F"/>
                 </a:solidFill>
               </a:rPr>
-              <a:t>사업장 점검 · 2027. 00. 00</a:t>
+              <a:t>사업장 점검 · 날짜 입력</a:t>
             </a:r>
           </a:p>
           <a:p>
@@ -3438,7 +3518,7 @@
             <a:r>
               <a:rPr sz="1400" b="0" i="0">
                 <a:solidFill>
-                  <a:srgbClr val="666666"/>
+                  <a:srgbClr val="26231F"/>
                 </a:solidFill>
               </a:rPr>
               <a:t>가입 내용을 정리하고 함께 확인하는 양식</a:t>
@@ -3460,7 +3540,7 @@
     <p:bg>
       <p:bgPr>
         <a:solidFill>
-          <a:srgbClr val="FAF6EF"/>
+          <a:srgbClr val="FFFFFF"/>
         </a:solidFill>
         <a:effectLst/>
       </p:bgPr>
@@ -3480,14 +3560,14 @@
         </p:nvSpPr>
         <p:spPr>
           <a:xfrm>
-            <a:off x="0" y="0"/>
-            <a:ext cx="12191695" cy="274320"/>
+            <a:off x="0" y="6565392"/>
+            <a:ext cx="12191695" cy="292608"/>
           </a:xfrm>
           <a:prstGeom prst="rect">
             <a:avLst/>
           </a:prstGeom>
           <a:solidFill>
-            <a:srgbClr val="C49645"/>
+            <a:srgbClr val="EBD4AD"/>
           </a:solidFill>
           <a:ln>
             <a:noFill/>
@@ -3503,20 +3583,49 @@
       </p:sp>
       <p:sp>
         <p:nvSpPr>
-          <p:cNvPr id="4" name="장식"/>
+          <p:cNvPr id="4" name="포인트"/>
           <p:cNvSpPr/>
           <p:nvPr/>
         </p:nvSpPr>
         <p:spPr>
           <a:xfrm>
-            <a:off x="0" y="274320"/>
-            <a:ext cx="12191695" cy="54864"/>
+            <a:off x="5958687" y="246888"/>
+            <a:ext cx="274320" cy="109728"/>
+          </a:xfrm>
+          <a:prstGeom prst="wave">
+            <a:avLst/>
+          </a:prstGeom>
+          <a:solidFill>
+            <a:srgbClr val="E1C698"/>
+          </a:solidFill>
+          <a:ln>
+            <a:noFill/>
+          </a:ln>
+        </p:spPr>
+        <p:txBody>
+          <a:bodyPr rtlCol="0" anchor="ctr"/>
+          <a:lstStyle/>
+          <a:p>
+            <a:pPr algn="ctr"/>
+          </a:p>
+        </p:txBody>
+      </p:sp>
+      <p:sp>
+        <p:nvSpPr>
+          <p:cNvPr id="5" name="장식"/>
+          <p:cNvSpPr/>
+          <p:nvPr/>
+        </p:nvSpPr>
+        <p:spPr>
+          <a:xfrm>
+            <a:off x="5684367" y="1572768"/>
+            <a:ext cx="822960" cy="22860"/>
           </a:xfrm>
           <a:prstGeom prst="rect">
             <a:avLst/>
           </a:prstGeom>
           <a:solidFill>
-            <a:srgbClr val="3B8591"/>
+            <a:srgbClr val="E1C698"/>
           </a:solidFill>
           <a:ln>
             <a:noFill/>
@@ -3527,6 +3636,44 @@
           <a:lstStyle/>
           <a:p>
             <a:pPr algn="ctr"/>
+          </a:p>
+        </p:txBody>
+      </p:sp>
+      <p:sp>
+        <p:nvSpPr>
+          <p:cNvPr id="6" name="상단 라벨"/>
+          <p:cNvSpPr txBox="1"/>
+          <p:nvPr/>
+        </p:nvSpPr>
+        <p:spPr>
+          <a:xfrm>
+            <a:off x="640080" y="182880"/>
+            <a:ext cx="3657600" cy="274320"/>
+          </a:xfrm>
+          <a:prstGeom prst="rect">
+            <a:avLst/>
+          </a:prstGeom>
+          <a:noFill/>
+        </p:spPr>
+        <p:txBody>
+          <a:bodyPr wrap="square" lIns="54864" rIns="54864" tIns="27432" bIns="27432" anchor="ctr">
+            <a:noAutofit/>
+          </a:bodyPr>
+          <a:lstStyle/>
+          <a:p>
+            <a:pPr algn="l">
+              <a:lnSpc>
+                <a:spcPct val="115000"/>
+              </a:lnSpc>
+            </a:pPr>
+            <a:r>
+              <a:rPr sz="800" b="1" i="0" spc="250">
+                <a:solidFill>
+                  <a:srgbClr val="8E8780"/>
+                </a:solidFill>
+              </a:rPr>
+              <a:t>INSURANCE CHECK</a:t>
+            </a:r>
           </a:p>
         </p:txBody>
       </p:sp>
@@ -3542,8 +3689,8 @@
         </p:nvSpPr>
         <p:spPr>
           <a:xfrm>
-            <a:off x="640080" y="457200"/>
-            <a:ext cx="9722815" cy="868680"/>
+            <a:off x="1371600" y="640080"/>
+            <a:ext cx="9448495" cy="868680"/>
           </a:xfrm>
         </p:spPr>
         <p:txBody>
@@ -3552,7 +3699,7 @@
           </a:bodyPr>
           <a:lstStyle/>
           <a:p>
-            <a:pPr algn="l">
+            <a:pPr algn="ctr">
               <a:lnSpc>
                 <a:spcPct val="105000"/>
               </a:lnSpc>
@@ -3560,7 +3707,7 @@
             <a:r>
               <a:rPr sz="3000" b="1" i="0">
                 <a:solidFill>
-                  <a:srgbClr val="7C5D27"/>
+                  <a:srgbClr val="26231F"/>
                 </a:solidFill>
               </a:rPr>
               <a:t>점검 대상 현황</a:t>
@@ -3570,14 +3717,14 @@
       </p:sp>
       <p:graphicFrame>
         <p:nvGraphicFramePr>
-          <p:cNvPr id="5" name="표"/>
+          <p:cNvPr id="7" name="표"/>
           <p:cNvGraphicFramePr>
             <a:graphicFrameLocks noGrp="1"/>
           </p:cNvGraphicFramePr>
           <p:nvPr/>
         </p:nvGraphicFramePr>
         <p:xfrm>
-          <a:off x="640080" y="1600200"/>
+          <a:off x="640080" y="1783080"/>
           <a:ext cx="10911534" cy="3657600"/>
         </p:xfrm>
         <a:graphic>
@@ -3600,7 +3747,7 @@
                       <a:r>
                         <a:rPr sz="1600" b="1">
                           <a:solidFill>
-                            <a:srgbClr val="FFFFFF"/>
+                            <a:srgbClr val="26231F"/>
                           </a:solidFill>
                         </a:rPr>
                         <a:t>구분</a:t>
@@ -3610,30 +3757,30 @@
                   <a:tcPr anchor="ctr" marL="73152" marR="73152">
                     <a:lnL w="9525" cap="flat" cmpd="sng" algn="ctr">
                       <a:solidFill>
-                        <a:srgbClr val="C49645"/>
+                        <a:srgbClr val="E1C698"/>
                       </a:solidFill>
                       <a:prstDash val="solid"/>
                     </a:lnL>
                     <a:lnR w="9525" cap="flat" cmpd="sng" algn="ctr">
                       <a:solidFill>
-                        <a:srgbClr val="C49645"/>
+                        <a:srgbClr val="E1C698"/>
                       </a:solidFill>
                       <a:prstDash val="solid"/>
                     </a:lnR>
                     <a:lnT w="9525" cap="flat" cmpd="sng" algn="ctr">
                       <a:solidFill>
-                        <a:srgbClr val="C49645"/>
+                        <a:srgbClr val="E1C698"/>
                       </a:solidFill>
                       <a:prstDash val="solid"/>
                     </a:lnT>
                     <a:lnB w="9525" cap="flat" cmpd="sng" algn="ctr">
                       <a:solidFill>
-                        <a:srgbClr val="C49645"/>
+                        <a:srgbClr val="E1C698"/>
                       </a:solidFill>
                       <a:prstDash val="solid"/>
                     </a:lnB>
                     <a:solidFill>
-                      <a:srgbClr val="C49645"/>
+                      <a:srgbClr val="E1C698"/>
                     </a:solidFill>
                   </a:tcPr>
                 </a:tc>
@@ -3646,7 +3793,7 @@
                       <a:r>
                         <a:rPr sz="1600" b="1">
                           <a:solidFill>
-                            <a:srgbClr val="FFFFFF"/>
+                            <a:srgbClr val="26231F"/>
                           </a:solidFill>
                         </a:rPr>
                         <a:t>내용</a:t>
@@ -3656,30 +3803,30 @@
                   <a:tcPr anchor="ctr" marL="73152" marR="73152">
                     <a:lnL w="9525" cap="flat" cmpd="sng" algn="ctr">
                       <a:solidFill>
-                        <a:srgbClr val="C49645"/>
+                        <a:srgbClr val="E1C698"/>
                       </a:solidFill>
                       <a:prstDash val="solid"/>
                     </a:lnL>
                     <a:lnR w="9525" cap="flat" cmpd="sng" algn="ctr">
                       <a:solidFill>
-                        <a:srgbClr val="C49645"/>
+                        <a:srgbClr val="E1C698"/>
                       </a:solidFill>
                       <a:prstDash val="solid"/>
                     </a:lnR>
                     <a:lnT w="9525" cap="flat" cmpd="sng" algn="ctr">
                       <a:solidFill>
-                        <a:srgbClr val="C49645"/>
+                        <a:srgbClr val="E1C698"/>
                       </a:solidFill>
                       <a:prstDash val="solid"/>
                     </a:lnT>
                     <a:lnB w="9525" cap="flat" cmpd="sng" algn="ctr">
                       <a:solidFill>
-                        <a:srgbClr val="C49645"/>
+                        <a:srgbClr val="E1C698"/>
                       </a:solidFill>
                       <a:prstDash val="solid"/>
                     </a:lnB>
                     <a:solidFill>
-                      <a:srgbClr val="C49645"/>
+                      <a:srgbClr val="E1C698"/>
                     </a:solidFill>
                   </a:tcPr>
                 </a:tc>
@@ -3694,7 +3841,7 @@
                       <a:r>
                         <a:rPr sz="1600" b="1">
                           <a:solidFill>
-                            <a:srgbClr val="7C5D27"/>
+                            <a:srgbClr val="493D27"/>
                           </a:solidFill>
                         </a:rPr>
                         <a:t>상호</a:t>
@@ -3704,30 +3851,30 @@
                   <a:tcPr anchor="ctr" marL="73152" marR="73152">
                     <a:lnL w="9525" cap="flat" cmpd="sng" algn="ctr">
                       <a:solidFill>
-                        <a:srgbClr val="F2E5CF"/>
+                        <a:srgbClr val="F6EAD5"/>
                       </a:solidFill>
                       <a:prstDash val="solid"/>
                     </a:lnL>
                     <a:lnR w="9525" cap="flat" cmpd="sng" algn="ctr">
                       <a:solidFill>
-                        <a:srgbClr val="F2E5CF"/>
+                        <a:srgbClr val="F6EAD5"/>
                       </a:solidFill>
                       <a:prstDash val="solid"/>
                     </a:lnR>
                     <a:lnT w="9525" cap="flat" cmpd="sng" algn="ctr">
                       <a:solidFill>
-                        <a:srgbClr val="F2E5CF"/>
+                        <a:srgbClr val="F6EAD5"/>
                       </a:solidFill>
                       <a:prstDash val="solid"/>
                     </a:lnT>
                     <a:lnB w="9525" cap="flat" cmpd="sng" algn="ctr">
                       <a:solidFill>
-                        <a:srgbClr val="F2E5CF"/>
+                        <a:srgbClr val="F6EAD5"/>
                       </a:solidFill>
                       <a:prstDash val="solid"/>
                     </a:lnB>
                     <a:solidFill>
-                      <a:srgbClr val="F2E5CF"/>
+                      <a:srgbClr val="F6EAD5"/>
                     </a:solidFill>
                   </a:tcPr>
                 </a:tc>
@@ -3740,7 +3887,7 @@
                       <a:r>
                         <a:rPr sz="1600" b="0">
                           <a:solidFill>
-                            <a:srgbClr val="2B2B2B"/>
+                            <a:srgbClr val="26231F"/>
                           </a:solidFill>
                         </a:rPr>
                         <a:t/>
@@ -3750,25 +3897,25 @@
                   <a:tcPr anchor="ctr" marL="73152" marR="73152">
                     <a:lnL w="9525" cap="flat" cmpd="sng" algn="ctr">
                       <a:solidFill>
-                        <a:srgbClr val="F2E5CF"/>
+                        <a:srgbClr val="F6EAD5"/>
                       </a:solidFill>
                       <a:prstDash val="solid"/>
                     </a:lnL>
                     <a:lnR w="9525" cap="flat" cmpd="sng" algn="ctr">
                       <a:solidFill>
-                        <a:srgbClr val="F2E5CF"/>
+                        <a:srgbClr val="F6EAD5"/>
                       </a:solidFill>
                       <a:prstDash val="solid"/>
                     </a:lnR>
                     <a:lnT w="9525" cap="flat" cmpd="sng" algn="ctr">
                       <a:solidFill>
-                        <a:srgbClr val="F2E5CF"/>
+                        <a:srgbClr val="F6EAD5"/>
                       </a:solidFill>
                       <a:prstDash val="solid"/>
                     </a:lnT>
                     <a:lnB w="9525" cap="flat" cmpd="sng" algn="ctr">
                       <a:solidFill>
-                        <a:srgbClr val="F2E5CF"/>
+                        <a:srgbClr val="F6EAD5"/>
                       </a:solidFill>
                       <a:prstDash val="solid"/>
                     </a:lnB>
@@ -3788,7 +3935,7 @@
                       <a:r>
                         <a:rPr sz="1600" b="1">
                           <a:solidFill>
-                            <a:srgbClr val="7C5D27"/>
+                            <a:srgbClr val="493D27"/>
                           </a:solidFill>
                         </a:rPr>
                         <a:t>업종</a:t>
@@ -3798,30 +3945,30 @@
                   <a:tcPr anchor="ctr" marL="73152" marR="73152">
                     <a:lnL w="9525" cap="flat" cmpd="sng" algn="ctr">
                       <a:solidFill>
-                        <a:srgbClr val="F2E5CF"/>
+                        <a:srgbClr val="F6EAD5"/>
                       </a:solidFill>
                       <a:prstDash val="solid"/>
                     </a:lnL>
                     <a:lnR w="9525" cap="flat" cmpd="sng" algn="ctr">
                       <a:solidFill>
-                        <a:srgbClr val="F2E5CF"/>
+                        <a:srgbClr val="F6EAD5"/>
                       </a:solidFill>
                       <a:prstDash val="solid"/>
                     </a:lnR>
                     <a:lnT w="9525" cap="flat" cmpd="sng" algn="ctr">
                       <a:solidFill>
-                        <a:srgbClr val="F2E5CF"/>
+                        <a:srgbClr val="F6EAD5"/>
                       </a:solidFill>
                       <a:prstDash val="solid"/>
                     </a:lnT>
                     <a:lnB w="9525" cap="flat" cmpd="sng" algn="ctr">
                       <a:solidFill>
-                        <a:srgbClr val="F2E5CF"/>
+                        <a:srgbClr val="F6EAD5"/>
                       </a:solidFill>
                       <a:prstDash val="solid"/>
                     </a:lnB>
                     <a:solidFill>
-                      <a:srgbClr val="F2E5CF"/>
+                      <a:srgbClr val="F6EAD5"/>
                     </a:solidFill>
                   </a:tcPr>
                 </a:tc>
@@ -3834,7 +3981,7 @@
                       <a:r>
                         <a:rPr sz="1600" b="0">
                           <a:solidFill>
-                            <a:srgbClr val="2B2B2B"/>
+                            <a:srgbClr val="26231F"/>
                           </a:solidFill>
                         </a:rPr>
                         <a:t/>
@@ -3844,30 +3991,30 @@
                   <a:tcPr anchor="ctr" marL="73152" marR="73152">
                     <a:lnL w="9525" cap="flat" cmpd="sng" algn="ctr">
                       <a:solidFill>
-                        <a:srgbClr val="F2E5CF"/>
+                        <a:srgbClr val="F6EAD5"/>
                       </a:solidFill>
                       <a:prstDash val="solid"/>
                     </a:lnL>
                     <a:lnR w="9525" cap="flat" cmpd="sng" algn="ctr">
                       <a:solidFill>
-                        <a:srgbClr val="F2E5CF"/>
+                        <a:srgbClr val="F6EAD5"/>
                       </a:solidFill>
                       <a:prstDash val="solid"/>
                     </a:lnR>
                     <a:lnT w="9525" cap="flat" cmpd="sng" algn="ctr">
                       <a:solidFill>
-                        <a:srgbClr val="F2E5CF"/>
+                        <a:srgbClr val="F6EAD5"/>
                       </a:solidFill>
                       <a:prstDash val="solid"/>
                     </a:lnT>
                     <a:lnB w="9525" cap="flat" cmpd="sng" algn="ctr">
                       <a:solidFill>
-                        <a:srgbClr val="F2E5CF"/>
+                        <a:srgbClr val="F6EAD5"/>
                       </a:solidFill>
                       <a:prstDash val="solid"/>
                     </a:lnB>
                     <a:solidFill>
-                      <a:srgbClr val="FAF6EF"/>
+                      <a:srgbClr val="FBF6EC"/>
                     </a:solidFill>
                   </a:tcPr>
                 </a:tc>
@@ -3882,7 +4029,7 @@
                       <a:r>
                         <a:rPr sz="1600" b="1">
                           <a:solidFill>
-                            <a:srgbClr val="7C5D27"/>
+                            <a:srgbClr val="493D27"/>
                           </a:solidFill>
                         </a:rPr>
                         <a:t>직원 수</a:t>
@@ -3892,30 +4039,30 @@
                   <a:tcPr anchor="ctr" marL="73152" marR="73152">
                     <a:lnL w="9525" cap="flat" cmpd="sng" algn="ctr">
                       <a:solidFill>
-                        <a:srgbClr val="F2E5CF"/>
+                        <a:srgbClr val="F6EAD5"/>
                       </a:solidFill>
                       <a:prstDash val="solid"/>
                     </a:lnL>
                     <a:lnR w="9525" cap="flat" cmpd="sng" algn="ctr">
                       <a:solidFill>
-                        <a:srgbClr val="F2E5CF"/>
+                        <a:srgbClr val="F6EAD5"/>
                       </a:solidFill>
                       <a:prstDash val="solid"/>
                     </a:lnR>
                     <a:lnT w="9525" cap="flat" cmpd="sng" algn="ctr">
                       <a:solidFill>
-                        <a:srgbClr val="F2E5CF"/>
+                        <a:srgbClr val="F6EAD5"/>
                       </a:solidFill>
                       <a:prstDash val="solid"/>
                     </a:lnT>
                     <a:lnB w="9525" cap="flat" cmpd="sng" algn="ctr">
                       <a:solidFill>
-                        <a:srgbClr val="F2E5CF"/>
+                        <a:srgbClr val="F6EAD5"/>
                       </a:solidFill>
                       <a:prstDash val="solid"/>
                     </a:lnB>
                     <a:solidFill>
-                      <a:srgbClr val="F2E5CF"/>
+                      <a:srgbClr val="F6EAD5"/>
                     </a:solidFill>
                   </a:tcPr>
                 </a:tc>
@@ -3928,7 +4075,7 @@
                       <a:r>
                         <a:rPr sz="1600" b="0">
                           <a:solidFill>
-                            <a:srgbClr val="2B2B2B"/>
+                            <a:srgbClr val="26231F"/>
                           </a:solidFill>
                         </a:rPr>
                         <a:t/>
@@ -3938,25 +4085,25 @@
                   <a:tcPr anchor="ctr" marL="73152" marR="73152">
                     <a:lnL w="9525" cap="flat" cmpd="sng" algn="ctr">
                       <a:solidFill>
-                        <a:srgbClr val="F2E5CF"/>
+                        <a:srgbClr val="F6EAD5"/>
                       </a:solidFill>
                       <a:prstDash val="solid"/>
                     </a:lnL>
                     <a:lnR w="9525" cap="flat" cmpd="sng" algn="ctr">
                       <a:solidFill>
-                        <a:srgbClr val="F2E5CF"/>
+                        <a:srgbClr val="F6EAD5"/>
                       </a:solidFill>
                       <a:prstDash val="solid"/>
                     </a:lnR>
                     <a:lnT w="9525" cap="flat" cmpd="sng" algn="ctr">
                       <a:solidFill>
-                        <a:srgbClr val="F2E5CF"/>
+                        <a:srgbClr val="F6EAD5"/>
                       </a:solidFill>
                       <a:prstDash val="solid"/>
                     </a:lnT>
                     <a:lnB w="9525" cap="flat" cmpd="sng" algn="ctr">
                       <a:solidFill>
-                        <a:srgbClr val="F2E5CF"/>
+                        <a:srgbClr val="F6EAD5"/>
                       </a:solidFill>
                       <a:prstDash val="solid"/>
                     </a:lnB>
@@ -3976,7 +4123,7 @@
                       <a:r>
                         <a:rPr sz="1600" b="1">
                           <a:solidFill>
-                            <a:srgbClr val="7C5D27"/>
+                            <a:srgbClr val="493D27"/>
                           </a:solidFill>
                         </a:rPr>
                         <a:t>확인할 것</a:t>
@@ -3986,30 +4133,30 @@
                   <a:tcPr anchor="ctr" marL="73152" marR="73152">
                     <a:lnL w="9525" cap="flat" cmpd="sng" algn="ctr">
                       <a:solidFill>
-                        <a:srgbClr val="F2E5CF"/>
+                        <a:srgbClr val="F6EAD5"/>
                       </a:solidFill>
                       <a:prstDash val="solid"/>
                     </a:lnL>
                     <a:lnR w="9525" cap="flat" cmpd="sng" algn="ctr">
                       <a:solidFill>
-                        <a:srgbClr val="F2E5CF"/>
+                        <a:srgbClr val="F6EAD5"/>
                       </a:solidFill>
                       <a:prstDash val="solid"/>
                     </a:lnR>
                     <a:lnT w="9525" cap="flat" cmpd="sng" algn="ctr">
                       <a:solidFill>
-                        <a:srgbClr val="F2E5CF"/>
+                        <a:srgbClr val="F6EAD5"/>
                       </a:solidFill>
                       <a:prstDash val="solid"/>
                     </a:lnT>
                     <a:lnB w="9525" cap="flat" cmpd="sng" algn="ctr">
                       <a:solidFill>
-                        <a:srgbClr val="F2E5CF"/>
+                        <a:srgbClr val="F6EAD5"/>
                       </a:solidFill>
                       <a:prstDash val="solid"/>
                     </a:lnB>
                     <a:solidFill>
-                      <a:srgbClr val="F2E5CF"/>
+                      <a:srgbClr val="F6EAD5"/>
                     </a:solidFill>
                   </a:tcPr>
                 </a:tc>
@@ -4022,7 +4169,7 @@
                       <a:r>
                         <a:rPr sz="1600" b="0">
                           <a:solidFill>
-                            <a:srgbClr val="2B2B2B"/>
+                            <a:srgbClr val="26231F"/>
                           </a:solidFill>
                         </a:rPr>
                         <a:t/>
@@ -4032,30 +4179,30 @@
                   <a:tcPr anchor="ctr" marL="73152" marR="73152">
                     <a:lnL w="9525" cap="flat" cmpd="sng" algn="ctr">
                       <a:solidFill>
-                        <a:srgbClr val="F2E5CF"/>
+                        <a:srgbClr val="F6EAD5"/>
                       </a:solidFill>
                       <a:prstDash val="solid"/>
                     </a:lnL>
                     <a:lnR w="9525" cap="flat" cmpd="sng" algn="ctr">
                       <a:solidFill>
-                        <a:srgbClr val="F2E5CF"/>
+                        <a:srgbClr val="F6EAD5"/>
                       </a:solidFill>
                       <a:prstDash val="solid"/>
                     </a:lnR>
                     <a:lnT w="9525" cap="flat" cmpd="sng" algn="ctr">
                       <a:solidFill>
-                        <a:srgbClr val="F2E5CF"/>
+                        <a:srgbClr val="F6EAD5"/>
                       </a:solidFill>
                       <a:prstDash val="solid"/>
                     </a:lnT>
                     <a:lnB w="9525" cap="flat" cmpd="sng" algn="ctr">
                       <a:solidFill>
-                        <a:srgbClr val="F2E5CF"/>
+                        <a:srgbClr val="F6EAD5"/>
                       </a:solidFill>
                       <a:prstDash val="solid"/>
                     </a:lnB>
                     <a:solidFill>
-                      <a:srgbClr val="FAF6EF"/>
+                      <a:srgbClr val="FBF6EC"/>
                     </a:solidFill>
                   </a:tcPr>
                 </a:tc>
@@ -4078,7 +4225,7 @@
     <p:bg>
       <p:bgPr>
         <a:solidFill>
-          <a:srgbClr val="FAF6EF"/>
+          <a:srgbClr val="FFFFFF"/>
         </a:solidFill>
         <a:effectLst/>
       </p:bgPr>
@@ -4098,14 +4245,14 @@
         </p:nvSpPr>
         <p:spPr>
           <a:xfrm>
-            <a:off x="0" y="0"/>
-            <a:ext cx="12191695" cy="274320"/>
+            <a:off x="0" y="6565392"/>
+            <a:ext cx="12191695" cy="292608"/>
           </a:xfrm>
           <a:prstGeom prst="rect">
             <a:avLst/>
           </a:prstGeom>
           <a:solidFill>
-            <a:srgbClr val="C49645"/>
+            <a:srgbClr val="EBD4AD"/>
           </a:solidFill>
           <a:ln>
             <a:noFill/>
@@ -4121,20 +4268,49 @@
       </p:sp>
       <p:sp>
         <p:nvSpPr>
-          <p:cNvPr id="4" name="장식"/>
+          <p:cNvPr id="4" name="포인트"/>
           <p:cNvSpPr/>
           <p:nvPr/>
         </p:nvSpPr>
         <p:spPr>
           <a:xfrm>
-            <a:off x="0" y="274320"/>
-            <a:ext cx="12191695" cy="54864"/>
+            <a:off x="5958687" y="246888"/>
+            <a:ext cx="274320" cy="109728"/>
+          </a:xfrm>
+          <a:prstGeom prst="wave">
+            <a:avLst/>
+          </a:prstGeom>
+          <a:solidFill>
+            <a:srgbClr val="E1C698"/>
+          </a:solidFill>
+          <a:ln>
+            <a:noFill/>
+          </a:ln>
+        </p:spPr>
+        <p:txBody>
+          <a:bodyPr rtlCol="0" anchor="ctr"/>
+          <a:lstStyle/>
+          <a:p>
+            <a:pPr algn="ctr"/>
+          </a:p>
+        </p:txBody>
+      </p:sp>
+      <p:sp>
+        <p:nvSpPr>
+          <p:cNvPr id="5" name="장식"/>
+          <p:cNvSpPr/>
+          <p:nvPr/>
+        </p:nvSpPr>
+        <p:spPr>
+          <a:xfrm>
+            <a:off x="5684367" y="1572768"/>
+            <a:ext cx="822960" cy="22860"/>
           </a:xfrm>
           <a:prstGeom prst="rect">
             <a:avLst/>
           </a:prstGeom>
           <a:solidFill>
-            <a:srgbClr val="3B8591"/>
+            <a:srgbClr val="E1C698"/>
           </a:solidFill>
           <a:ln>
             <a:noFill/>
@@ -4145,6 +4321,44 @@
           <a:lstStyle/>
           <a:p>
             <a:pPr algn="ctr"/>
+          </a:p>
+        </p:txBody>
+      </p:sp>
+      <p:sp>
+        <p:nvSpPr>
+          <p:cNvPr id="6" name="상단 라벨"/>
+          <p:cNvSpPr txBox="1"/>
+          <p:nvPr/>
+        </p:nvSpPr>
+        <p:spPr>
+          <a:xfrm>
+            <a:off x="640080" y="182880"/>
+            <a:ext cx="3657600" cy="274320"/>
+          </a:xfrm>
+          <a:prstGeom prst="rect">
+            <a:avLst/>
+          </a:prstGeom>
+          <a:noFill/>
+        </p:spPr>
+        <p:txBody>
+          <a:bodyPr wrap="square" lIns="54864" rIns="54864" tIns="27432" bIns="27432" anchor="ctr">
+            <a:noAutofit/>
+          </a:bodyPr>
+          <a:lstStyle/>
+          <a:p>
+            <a:pPr algn="l">
+              <a:lnSpc>
+                <a:spcPct val="115000"/>
+              </a:lnSpc>
+            </a:pPr>
+            <a:r>
+              <a:rPr sz="800" b="1" i="0" spc="250">
+                <a:solidFill>
+                  <a:srgbClr val="8E8780"/>
+                </a:solidFill>
+              </a:rPr>
+              <a:t>INSURANCE CHECK</a:t>
+            </a:r>
           </a:p>
         </p:txBody>
       </p:sp>
@@ -4160,8 +4374,8 @@
         </p:nvSpPr>
         <p:spPr>
           <a:xfrm>
-            <a:off x="640080" y="457200"/>
-            <a:ext cx="9722815" cy="868680"/>
+            <a:off x="1371600" y="640080"/>
+            <a:ext cx="9448495" cy="868680"/>
           </a:xfrm>
         </p:spPr>
         <p:txBody>
@@ -4170,7 +4384,7 @@
           </a:bodyPr>
           <a:lstStyle/>
           <a:p>
-            <a:pPr algn="l">
+            <a:pPr algn="ctr">
               <a:lnSpc>
                 <a:spcPct val="105000"/>
               </a:lnSpc>
@@ -4178,7 +4392,7 @@
             <a:r>
               <a:rPr sz="3000" b="1" i="0">
                 <a:solidFill>
-                  <a:srgbClr val="7C5D27"/>
+                  <a:srgbClr val="26231F"/>
                 </a:solidFill>
               </a:rPr>
               <a:t>가입한 보험 목록</a:t>
@@ -4188,14 +4402,14 @@
       </p:sp>
       <p:graphicFrame>
         <p:nvGraphicFramePr>
-          <p:cNvPr id="5" name="표"/>
+          <p:cNvPr id="7" name="표"/>
           <p:cNvGraphicFramePr>
             <a:graphicFrameLocks noGrp="1"/>
           </p:cNvGraphicFramePr>
           <p:nvPr/>
         </p:nvGraphicFramePr>
         <p:xfrm>
-          <a:off x="640080" y="1600200"/>
+          <a:off x="640080" y="1783080"/>
           <a:ext cx="10911535" cy="4224528"/>
         </p:xfrm>
         <a:graphic>
@@ -4221,7 +4435,7 @@
                       <a:r>
                         <a:rPr sz="1400" b="1">
                           <a:solidFill>
-                            <a:srgbClr val="FFFFFF"/>
+                            <a:srgbClr val="26231F"/>
                           </a:solidFill>
                         </a:rPr>
                         <a:t>보험회사</a:t>
@@ -4231,30 +4445,30 @@
                   <a:tcPr anchor="ctr" marL="73152" marR="73152">
                     <a:lnL w="9525" cap="flat" cmpd="sng" algn="ctr">
                       <a:solidFill>
-                        <a:srgbClr val="C49645"/>
+                        <a:srgbClr val="E1C698"/>
                       </a:solidFill>
                       <a:prstDash val="solid"/>
                     </a:lnL>
                     <a:lnR w="9525" cap="flat" cmpd="sng" algn="ctr">
                       <a:solidFill>
-                        <a:srgbClr val="C49645"/>
+                        <a:srgbClr val="E1C698"/>
                       </a:solidFill>
                       <a:prstDash val="solid"/>
                     </a:lnR>
                     <a:lnT w="9525" cap="flat" cmpd="sng" algn="ctr">
                       <a:solidFill>
-                        <a:srgbClr val="C49645"/>
+                        <a:srgbClr val="E1C698"/>
                       </a:solidFill>
                       <a:prstDash val="solid"/>
                     </a:lnT>
                     <a:lnB w="9525" cap="flat" cmpd="sng" algn="ctr">
                       <a:solidFill>
-                        <a:srgbClr val="C49645"/>
+                        <a:srgbClr val="E1C698"/>
                       </a:solidFill>
                       <a:prstDash val="solid"/>
                     </a:lnB>
                     <a:solidFill>
-                      <a:srgbClr val="C49645"/>
+                      <a:srgbClr val="E1C698"/>
                     </a:solidFill>
                   </a:tcPr>
                 </a:tc>
@@ -4267,7 +4481,7 @@
                       <a:r>
                         <a:rPr sz="1400" b="1">
                           <a:solidFill>
-                            <a:srgbClr val="FFFFFF"/>
+                            <a:srgbClr val="26231F"/>
                           </a:solidFill>
                         </a:rPr>
                         <a:t>상품명</a:t>
@@ -4277,30 +4491,30 @@
                   <a:tcPr anchor="ctr" marL="73152" marR="73152">
                     <a:lnL w="9525" cap="flat" cmpd="sng" algn="ctr">
                       <a:solidFill>
-                        <a:srgbClr val="C49645"/>
+                        <a:srgbClr val="E1C698"/>
                       </a:solidFill>
                       <a:prstDash val="solid"/>
                     </a:lnL>
                     <a:lnR w="9525" cap="flat" cmpd="sng" algn="ctr">
                       <a:solidFill>
-                        <a:srgbClr val="C49645"/>
+                        <a:srgbClr val="E1C698"/>
                       </a:solidFill>
                       <a:prstDash val="solid"/>
                     </a:lnR>
                     <a:lnT w="9525" cap="flat" cmpd="sng" algn="ctr">
                       <a:solidFill>
-                        <a:srgbClr val="C49645"/>
+                        <a:srgbClr val="E1C698"/>
                       </a:solidFill>
                       <a:prstDash val="solid"/>
                     </a:lnT>
                     <a:lnB w="9525" cap="flat" cmpd="sng" algn="ctr">
                       <a:solidFill>
-                        <a:srgbClr val="C49645"/>
+                        <a:srgbClr val="E1C698"/>
                       </a:solidFill>
                       <a:prstDash val="solid"/>
                     </a:lnB>
                     <a:solidFill>
-                      <a:srgbClr val="C49645"/>
+                      <a:srgbClr val="E1C698"/>
                     </a:solidFill>
                   </a:tcPr>
                 </a:tc>
@@ -4313,7 +4527,7 @@
                       <a:r>
                         <a:rPr sz="1400" b="1">
                           <a:solidFill>
-                            <a:srgbClr val="FFFFFF"/>
+                            <a:srgbClr val="26231F"/>
                           </a:solidFill>
                         </a:rPr>
                         <a:t>종류</a:t>
@@ -4323,30 +4537,30 @@
                   <a:tcPr anchor="ctr" marL="73152" marR="73152">
                     <a:lnL w="9525" cap="flat" cmpd="sng" algn="ctr">
                       <a:solidFill>
-                        <a:srgbClr val="C49645"/>
+                        <a:srgbClr val="E1C698"/>
                       </a:solidFill>
                       <a:prstDash val="solid"/>
                     </a:lnL>
                     <a:lnR w="9525" cap="flat" cmpd="sng" algn="ctr">
                       <a:solidFill>
-                        <a:srgbClr val="C49645"/>
+                        <a:srgbClr val="E1C698"/>
                       </a:solidFill>
                       <a:prstDash val="solid"/>
                     </a:lnR>
                     <a:lnT w="9525" cap="flat" cmpd="sng" algn="ctr">
                       <a:solidFill>
-                        <a:srgbClr val="C49645"/>
+                        <a:srgbClr val="E1C698"/>
                       </a:solidFill>
                       <a:prstDash val="solid"/>
                     </a:lnT>
                     <a:lnB w="9525" cap="flat" cmpd="sng" algn="ctr">
                       <a:solidFill>
-                        <a:srgbClr val="C49645"/>
+                        <a:srgbClr val="E1C698"/>
                       </a:solidFill>
                       <a:prstDash val="solid"/>
                     </a:lnB>
                     <a:solidFill>
-                      <a:srgbClr val="C49645"/>
+                      <a:srgbClr val="E1C698"/>
                     </a:solidFill>
                   </a:tcPr>
                 </a:tc>
@@ -4359,7 +4573,7 @@
                       <a:r>
                         <a:rPr sz="1400" b="1">
                           <a:solidFill>
-                            <a:srgbClr val="FFFFFF"/>
+                            <a:srgbClr val="26231F"/>
                           </a:solidFill>
                         </a:rPr>
                         <a:t>만기일</a:t>
@@ -4369,30 +4583,30 @@
                   <a:tcPr anchor="ctr" marL="73152" marR="73152">
                     <a:lnL w="9525" cap="flat" cmpd="sng" algn="ctr">
                       <a:solidFill>
-                        <a:srgbClr val="C49645"/>
+                        <a:srgbClr val="E1C698"/>
                       </a:solidFill>
                       <a:prstDash val="solid"/>
                     </a:lnL>
                     <a:lnR w="9525" cap="flat" cmpd="sng" algn="ctr">
                       <a:solidFill>
-                        <a:srgbClr val="C49645"/>
+                        <a:srgbClr val="E1C698"/>
                       </a:solidFill>
                       <a:prstDash val="solid"/>
                     </a:lnR>
                     <a:lnT w="9525" cap="flat" cmpd="sng" algn="ctr">
                       <a:solidFill>
-                        <a:srgbClr val="C49645"/>
+                        <a:srgbClr val="E1C698"/>
                       </a:solidFill>
                       <a:prstDash val="solid"/>
                     </a:lnT>
                     <a:lnB w="9525" cap="flat" cmpd="sng" algn="ctr">
                       <a:solidFill>
-                        <a:srgbClr val="C49645"/>
+                        <a:srgbClr val="E1C698"/>
                       </a:solidFill>
                       <a:prstDash val="solid"/>
                     </a:lnB>
                     <a:solidFill>
-                      <a:srgbClr val="C49645"/>
+                      <a:srgbClr val="E1C698"/>
                     </a:solidFill>
                   </a:tcPr>
                 </a:tc>
@@ -4405,7 +4619,7 @@
                       <a:r>
                         <a:rPr sz="1400" b="1">
                           <a:solidFill>
-                            <a:srgbClr val="FFFFFF"/>
+                            <a:srgbClr val="26231F"/>
                           </a:solidFill>
                         </a:rPr>
                         <a:t>월 보험료</a:t>
@@ -4415,30 +4629,30 @@
                   <a:tcPr anchor="ctr" marL="73152" marR="73152">
                     <a:lnL w="9525" cap="flat" cmpd="sng" algn="ctr">
                       <a:solidFill>
-                        <a:srgbClr val="C49645"/>
+                        <a:srgbClr val="E1C698"/>
                       </a:solidFill>
                       <a:prstDash val="solid"/>
                     </a:lnL>
                     <a:lnR w="9525" cap="flat" cmpd="sng" algn="ctr">
                       <a:solidFill>
-                        <a:srgbClr val="C49645"/>
+                        <a:srgbClr val="E1C698"/>
                       </a:solidFill>
                       <a:prstDash val="solid"/>
                     </a:lnR>
                     <a:lnT w="9525" cap="flat" cmpd="sng" algn="ctr">
                       <a:solidFill>
-                        <a:srgbClr val="C49645"/>
+                        <a:srgbClr val="E1C698"/>
                       </a:solidFill>
                       <a:prstDash val="solid"/>
                     </a:lnT>
                     <a:lnB w="9525" cap="flat" cmpd="sng" algn="ctr">
                       <a:solidFill>
-                        <a:srgbClr val="C49645"/>
+                        <a:srgbClr val="E1C698"/>
                       </a:solidFill>
                       <a:prstDash val="solid"/>
                     </a:lnB>
                     <a:solidFill>
-                      <a:srgbClr val="C49645"/>
+                      <a:srgbClr val="E1C698"/>
                     </a:solidFill>
                   </a:tcPr>
                 </a:tc>
@@ -4453,7 +4667,7 @@
                       <a:r>
                         <a:rPr sz="1400" b="0">
                           <a:solidFill>
-                            <a:srgbClr val="2B2B2B"/>
+                            <a:srgbClr val="26231F"/>
                           </a:solidFill>
                         </a:rPr>
                         <a:t/>
@@ -4463,25 +4677,25 @@
                   <a:tcPr anchor="ctr" marL="73152" marR="73152">
                     <a:lnL w="9525" cap="flat" cmpd="sng" algn="ctr">
                       <a:solidFill>
-                        <a:srgbClr val="F2E5CF"/>
+                        <a:srgbClr val="F6EAD5"/>
                       </a:solidFill>
                       <a:prstDash val="solid"/>
                     </a:lnL>
                     <a:lnR w="9525" cap="flat" cmpd="sng" algn="ctr">
                       <a:solidFill>
-                        <a:srgbClr val="F2E5CF"/>
+                        <a:srgbClr val="F6EAD5"/>
                       </a:solidFill>
                       <a:prstDash val="solid"/>
                     </a:lnR>
                     <a:lnT w="9525" cap="flat" cmpd="sng" algn="ctr">
                       <a:solidFill>
-                        <a:srgbClr val="F2E5CF"/>
+                        <a:srgbClr val="F6EAD5"/>
                       </a:solidFill>
                       <a:prstDash val="solid"/>
                     </a:lnT>
                     <a:lnB w="9525" cap="flat" cmpd="sng" algn="ctr">
                       <a:solidFill>
-                        <a:srgbClr val="F2E5CF"/>
+                        <a:srgbClr val="F6EAD5"/>
                       </a:solidFill>
                       <a:prstDash val="solid"/>
                     </a:lnB>
@@ -4499,7 +4713,7 @@
                       <a:r>
                         <a:rPr sz="1400" b="0">
                           <a:solidFill>
-                            <a:srgbClr val="2B2B2B"/>
+                            <a:srgbClr val="26231F"/>
                           </a:solidFill>
                         </a:rPr>
                         <a:t/>
@@ -4509,25 +4723,25 @@
                   <a:tcPr anchor="ctr" marL="73152" marR="73152">
                     <a:lnL w="9525" cap="flat" cmpd="sng" algn="ctr">
                       <a:solidFill>
-                        <a:srgbClr val="F2E5CF"/>
+                        <a:srgbClr val="F6EAD5"/>
                       </a:solidFill>
                       <a:prstDash val="solid"/>
                     </a:lnL>
                     <a:lnR w="9525" cap="flat" cmpd="sng" algn="ctr">
                       <a:solidFill>
-                        <a:srgbClr val="F2E5CF"/>
+                        <a:srgbClr val="F6EAD5"/>
                       </a:solidFill>
                       <a:prstDash val="solid"/>
                     </a:lnR>
                     <a:lnT w="9525" cap="flat" cmpd="sng" algn="ctr">
                       <a:solidFill>
-                        <a:srgbClr val="F2E5CF"/>
+                        <a:srgbClr val="F6EAD5"/>
                       </a:solidFill>
                       <a:prstDash val="solid"/>
                     </a:lnT>
                     <a:lnB w="9525" cap="flat" cmpd="sng" algn="ctr">
                       <a:solidFill>
-                        <a:srgbClr val="F2E5CF"/>
+                        <a:srgbClr val="F6EAD5"/>
                       </a:solidFill>
                       <a:prstDash val="solid"/>
                     </a:lnB>
@@ -4545,7 +4759,7 @@
                       <a:r>
                         <a:rPr sz="1400" b="0">
                           <a:solidFill>
-                            <a:srgbClr val="2B2B2B"/>
+                            <a:srgbClr val="26231F"/>
                           </a:solidFill>
                         </a:rPr>
                         <a:t/>
@@ -4555,25 +4769,25 @@
                   <a:tcPr anchor="ctr" marL="73152" marR="73152">
                     <a:lnL w="9525" cap="flat" cmpd="sng" algn="ctr">
                       <a:solidFill>
-                        <a:srgbClr val="F2E5CF"/>
+                        <a:srgbClr val="F6EAD5"/>
                       </a:solidFill>
                       <a:prstDash val="solid"/>
                     </a:lnL>
                     <a:lnR w="9525" cap="flat" cmpd="sng" algn="ctr">
                       <a:solidFill>
-                        <a:srgbClr val="F2E5CF"/>
+                        <a:srgbClr val="F6EAD5"/>
                       </a:solidFill>
                       <a:prstDash val="solid"/>
                     </a:lnR>
                     <a:lnT w="9525" cap="flat" cmpd="sng" algn="ctr">
                       <a:solidFill>
-                        <a:srgbClr val="F2E5CF"/>
+                        <a:srgbClr val="F6EAD5"/>
                       </a:solidFill>
                       <a:prstDash val="solid"/>
                     </a:lnT>
                     <a:lnB w="9525" cap="flat" cmpd="sng" algn="ctr">
                       <a:solidFill>
-                        <a:srgbClr val="F2E5CF"/>
+                        <a:srgbClr val="F6EAD5"/>
                       </a:solidFill>
                       <a:prstDash val="solid"/>
                     </a:lnB>
@@ -4591,7 +4805,7 @@
                       <a:r>
                         <a:rPr sz="1400" b="0">
                           <a:solidFill>
-                            <a:srgbClr val="2B2B2B"/>
+                            <a:srgbClr val="26231F"/>
                           </a:solidFill>
                         </a:rPr>
                         <a:t/>
@@ -4601,25 +4815,25 @@
                   <a:tcPr anchor="ctr" marL="73152" marR="73152">
                     <a:lnL w="9525" cap="flat" cmpd="sng" algn="ctr">
                       <a:solidFill>
-                        <a:srgbClr val="F2E5CF"/>
+                        <a:srgbClr val="F6EAD5"/>
                       </a:solidFill>
                       <a:prstDash val="solid"/>
                     </a:lnL>
                     <a:lnR w="9525" cap="flat" cmpd="sng" algn="ctr">
                       <a:solidFill>
-                        <a:srgbClr val="F2E5CF"/>
+                        <a:srgbClr val="F6EAD5"/>
                       </a:solidFill>
                       <a:prstDash val="solid"/>
                     </a:lnR>
                     <a:lnT w="9525" cap="flat" cmpd="sng" algn="ctr">
                       <a:solidFill>
-                        <a:srgbClr val="F2E5CF"/>
+                        <a:srgbClr val="F6EAD5"/>
                       </a:solidFill>
                       <a:prstDash val="solid"/>
                     </a:lnT>
                     <a:lnB w="9525" cap="flat" cmpd="sng" algn="ctr">
                       <a:solidFill>
-                        <a:srgbClr val="F2E5CF"/>
+                        <a:srgbClr val="F6EAD5"/>
                       </a:solidFill>
                       <a:prstDash val="solid"/>
                     </a:lnB>
@@ -4637,7 +4851,7 @@
                       <a:r>
                         <a:rPr sz="1400" b="0">
                           <a:solidFill>
-                            <a:srgbClr val="2B2B2B"/>
+                            <a:srgbClr val="26231F"/>
                           </a:solidFill>
                         </a:rPr>
                         <a:t/>
@@ -4647,25 +4861,25 @@
                   <a:tcPr anchor="ctr" marL="73152" marR="73152">
                     <a:lnL w="9525" cap="flat" cmpd="sng" algn="ctr">
                       <a:solidFill>
-                        <a:srgbClr val="F2E5CF"/>
+                        <a:srgbClr val="F6EAD5"/>
                       </a:solidFill>
                       <a:prstDash val="solid"/>
                     </a:lnL>
                     <a:lnR w="9525" cap="flat" cmpd="sng" algn="ctr">
                       <a:solidFill>
-                        <a:srgbClr val="F2E5CF"/>
+                        <a:srgbClr val="F6EAD5"/>
                       </a:solidFill>
                       <a:prstDash val="solid"/>
                     </a:lnR>
                     <a:lnT w="9525" cap="flat" cmpd="sng" algn="ctr">
                       <a:solidFill>
-                        <a:srgbClr val="F2E5CF"/>
+                        <a:srgbClr val="F6EAD5"/>
                       </a:solidFill>
                       <a:prstDash val="solid"/>
                     </a:lnT>
                     <a:lnB w="9525" cap="flat" cmpd="sng" algn="ctr">
                       <a:solidFill>
-                        <a:srgbClr val="F2E5CF"/>
+                        <a:srgbClr val="F6EAD5"/>
                       </a:solidFill>
                       <a:prstDash val="solid"/>
                     </a:lnB>
@@ -4685,7 +4899,7 @@
                       <a:r>
                         <a:rPr sz="1400" b="0">
                           <a:solidFill>
-                            <a:srgbClr val="2B2B2B"/>
+                            <a:srgbClr val="26231F"/>
                           </a:solidFill>
                         </a:rPr>
                         <a:t/>
@@ -4695,30 +4909,30 @@
                   <a:tcPr anchor="ctr" marL="73152" marR="73152">
                     <a:lnL w="9525" cap="flat" cmpd="sng" algn="ctr">
                       <a:solidFill>
-                        <a:srgbClr val="F2E5CF"/>
+                        <a:srgbClr val="F6EAD5"/>
                       </a:solidFill>
                       <a:prstDash val="solid"/>
                     </a:lnL>
                     <a:lnR w="9525" cap="flat" cmpd="sng" algn="ctr">
                       <a:solidFill>
-                        <a:srgbClr val="F2E5CF"/>
+                        <a:srgbClr val="F6EAD5"/>
                       </a:solidFill>
                       <a:prstDash val="solid"/>
                     </a:lnR>
                     <a:lnT w="9525" cap="flat" cmpd="sng" algn="ctr">
                       <a:solidFill>
-                        <a:srgbClr val="F2E5CF"/>
+                        <a:srgbClr val="F6EAD5"/>
                       </a:solidFill>
                       <a:prstDash val="solid"/>
                     </a:lnT>
                     <a:lnB w="9525" cap="flat" cmpd="sng" algn="ctr">
                       <a:solidFill>
-                        <a:srgbClr val="F2E5CF"/>
+                        <a:srgbClr val="F6EAD5"/>
                       </a:solidFill>
                       <a:prstDash val="solid"/>
                     </a:lnB>
                     <a:solidFill>
-                      <a:srgbClr val="FAF6EF"/>
+                      <a:srgbClr val="FBF6EC"/>
                     </a:solidFill>
                   </a:tcPr>
                 </a:tc>
@@ -4731,7 +4945,7 @@
                       <a:r>
                         <a:rPr sz="1400" b="0">
                           <a:solidFill>
-                            <a:srgbClr val="2B2B2B"/>
+                            <a:srgbClr val="26231F"/>
                           </a:solidFill>
                         </a:rPr>
                         <a:t/>
@@ -4741,30 +4955,30 @@
                   <a:tcPr anchor="ctr" marL="73152" marR="73152">
                     <a:lnL w="9525" cap="flat" cmpd="sng" algn="ctr">
                       <a:solidFill>
-                        <a:srgbClr val="F2E5CF"/>
+                        <a:srgbClr val="F6EAD5"/>
                       </a:solidFill>
                       <a:prstDash val="solid"/>
                     </a:lnL>
                     <a:lnR w="9525" cap="flat" cmpd="sng" algn="ctr">
                       <a:solidFill>
-                        <a:srgbClr val="F2E5CF"/>
+                        <a:srgbClr val="F6EAD5"/>
                       </a:solidFill>
                       <a:prstDash val="solid"/>
                     </a:lnR>
                     <a:lnT w="9525" cap="flat" cmpd="sng" algn="ctr">
                       <a:solidFill>
-                        <a:srgbClr val="F2E5CF"/>
+                        <a:srgbClr val="F6EAD5"/>
                       </a:solidFill>
                       <a:prstDash val="solid"/>
                     </a:lnT>
                     <a:lnB w="9525" cap="flat" cmpd="sng" algn="ctr">
                       <a:solidFill>
-                        <a:srgbClr val="F2E5CF"/>
+                        <a:srgbClr val="F6EAD5"/>
                       </a:solidFill>
                       <a:prstDash val="solid"/>
                     </a:lnB>
                     <a:solidFill>
-                      <a:srgbClr val="FAF6EF"/>
+                      <a:srgbClr val="FBF6EC"/>
                     </a:solidFill>
                   </a:tcPr>
                 </a:tc>
@@ -4777,7 +4991,7 @@
                       <a:r>
                         <a:rPr sz="1400" b="0">
                           <a:solidFill>
-                            <a:srgbClr val="2B2B2B"/>
+                            <a:srgbClr val="26231F"/>
                           </a:solidFill>
                         </a:rPr>
                         <a:t/>
@@ -4787,30 +5001,30 @@
                   <a:tcPr anchor="ctr" marL="73152" marR="73152">
                     <a:lnL w="9525" cap="flat" cmpd="sng" algn="ctr">
                       <a:solidFill>
-                        <a:srgbClr val="F2E5CF"/>
+                        <a:srgbClr val="F6EAD5"/>
                       </a:solidFill>
                       <a:prstDash val="solid"/>
                     </a:lnL>
                     <a:lnR w="9525" cap="flat" cmpd="sng" algn="ctr">
                       <a:solidFill>
-                        <a:srgbClr val="F2E5CF"/>
+                        <a:srgbClr val="F6EAD5"/>
                       </a:solidFill>
                       <a:prstDash val="solid"/>
                     </a:lnR>
                     <a:lnT w="9525" cap="flat" cmpd="sng" algn="ctr">
                       <a:solidFill>
-                        <a:srgbClr val="F2E5CF"/>
+                        <a:srgbClr val="F6EAD5"/>
                       </a:solidFill>
                       <a:prstDash val="solid"/>
                     </a:lnT>
                     <a:lnB w="9525" cap="flat" cmpd="sng" algn="ctr">
                       <a:solidFill>
-                        <a:srgbClr val="F2E5CF"/>
+                        <a:srgbClr val="F6EAD5"/>
                       </a:solidFill>
                       <a:prstDash val="solid"/>
                     </a:lnB>
                     <a:solidFill>
-                      <a:srgbClr val="FAF6EF"/>
+                      <a:srgbClr val="FBF6EC"/>
                     </a:solidFill>
                   </a:tcPr>
                 </a:tc>
@@ -4823,7 +5037,7 @@
                       <a:r>
                         <a:rPr sz="1400" b="0">
                           <a:solidFill>
-                            <a:srgbClr val="2B2B2B"/>
+                            <a:srgbClr val="26231F"/>
                           </a:solidFill>
                         </a:rPr>
                         <a:t/>
@@ -4833,30 +5047,30 @@
                   <a:tcPr anchor="ctr" marL="73152" marR="73152">
                     <a:lnL w="9525" cap="flat" cmpd="sng" algn="ctr">
                       <a:solidFill>
-                        <a:srgbClr val="F2E5CF"/>
+                        <a:srgbClr val="F6EAD5"/>
                       </a:solidFill>
                       <a:prstDash val="solid"/>
                     </a:lnL>
                     <a:lnR w="9525" cap="flat" cmpd="sng" algn="ctr">
                       <a:solidFill>
-                        <a:srgbClr val="F2E5CF"/>
+                        <a:srgbClr val="F6EAD5"/>
                       </a:solidFill>
                       <a:prstDash val="solid"/>
                     </a:lnR>
                     <a:lnT w="9525" cap="flat" cmpd="sng" algn="ctr">
                       <a:solidFill>
-                        <a:srgbClr val="F2E5CF"/>
+                        <a:srgbClr val="F6EAD5"/>
                       </a:solidFill>
                       <a:prstDash val="solid"/>
                     </a:lnT>
                     <a:lnB w="9525" cap="flat" cmpd="sng" algn="ctr">
                       <a:solidFill>
-                        <a:srgbClr val="F2E5CF"/>
+                        <a:srgbClr val="F6EAD5"/>
                       </a:solidFill>
                       <a:prstDash val="solid"/>
                     </a:lnB>
                     <a:solidFill>
-                      <a:srgbClr val="FAF6EF"/>
+                      <a:srgbClr val="FBF6EC"/>
                     </a:solidFill>
                   </a:tcPr>
                 </a:tc>
@@ -4869,7 +5083,7 @@
                       <a:r>
                         <a:rPr sz="1400" b="0">
                           <a:solidFill>
-                            <a:srgbClr val="2B2B2B"/>
+                            <a:srgbClr val="26231F"/>
                           </a:solidFill>
                         </a:rPr>
                         <a:t/>
@@ -4879,30 +5093,30 @@
                   <a:tcPr anchor="ctr" marL="73152" marR="73152">
                     <a:lnL w="9525" cap="flat" cmpd="sng" algn="ctr">
                       <a:solidFill>
-                        <a:srgbClr val="F2E5CF"/>
+                        <a:srgbClr val="F6EAD5"/>
                       </a:solidFill>
                       <a:prstDash val="solid"/>
                     </a:lnL>
                     <a:lnR w="9525" cap="flat" cmpd="sng" algn="ctr">
                       <a:solidFill>
-                        <a:srgbClr val="F2E5CF"/>
+                        <a:srgbClr val="F6EAD5"/>
                       </a:solidFill>
                       <a:prstDash val="solid"/>
                     </a:lnR>
                     <a:lnT w="9525" cap="flat" cmpd="sng" algn="ctr">
                       <a:solidFill>
-                        <a:srgbClr val="F2E5CF"/>
+                        <a:srgbClr val="F6EAD5"/>
                       </a:solidFill>
                       <a:prstDash val="solid"/>
                     </a:lnT>
                     <a:lnB w="9525" cap="flat" cmpd="sng" algn="ctr">
                       <a:solidFill>
-                        <a:srgbClr val="F2E5CF"/>
+                        <a:srgbClr val="F6EAD5"/>
                       </a:solidFill>
                       <a:prstDash val="solid"/>
                     </a:lnB>
                     <a:solidFill>
-                      <a:srgbClr val="FAF6EF"/>
+                      <a:srgbClr val="FBF6EC"/>
                     </a:solidFill>
                   </a:tcPr>
                 </a:tc>
@@ -4917,7 +5131,7 @@
                       <a:r>
                         <a:rPr sz="1400" b="0">
                           <a:solidFill>
-                            <a:srgbClr val="2B2B2B"/>
+                            <a:srgbClr val="26231F"/>
                           </a:solidFill>
                         </a:rPr>
                         <a:t/>
@@ -4927,25 +5141,25 @@
                   <a:tcPr anchor="ctr" marL="73152" marR="73152">
                     <a:lnL w="9525" cap="flat" cmpd="sng" algn="ctr">
                       <a:solidFill>
-                        <a:srgbClr val="F2E5CF"/>
+                        <a:srgbClr val="F6EAD5"/>
                       </a:solidFill>
                       <a:prstDash val="solid"/>
                     </a:lnL>
                     <a:lnR w="9525" cap="flat" cmpd="sng" algn="ctr">
                       <a:solidFill>
-                        <a:srgbClr val="F2E5CF"/>
+                        <a:srgbClr val="F6EAD5"/>
                       </a:solidFill>
                       <a:prstDash val="solid"/>
                     </a:lnR>
                     <a:lnT w="9525" cap="flat" cmpd="sng" algn="ctr">
                       <a:solidFill>
-                        <a:srgbClr val="F2E5CF"/>
+                        <a:srgbClr val="F6EAD5"/>
                       </a:solidFill>
                       <a:prstDash val="solid"/>
                     </a:lnT>
                     <a:lnB w="9525" cap="flat" cmpd="sng" algn="ctr">
                       <a:solidFill>
-                        <a:srgbClr val="F2E5CF"/>
+                        <a:srgbClr val="F6EAD5"/>
                       </a:solidFill>
                       <a:prstDash val="solid"/>
                     </a:lnB>
@@ -4963,7 +5177,7 @@
                       <a:r>
                         <a:rPr sz="1400" b="0">
                           <a:solidFill>
-                            <a:srgbClr val="2B2B2B"/>
+                            <a:srgbClr val="26231F"/>
                           </a:solidFill>
                         </a:rPr>
                         <a:t/>
@@ -4973,25 +5187,25 @@
                   <a:tcPr anchor="ctr" marL="73152" marR="73152">
                     <a:lnL w="9525" cap="flat" cmpd="sng" algn="ctr">
                       <a:solidFill>
-                        <a:srgbClr val="F2E5CF"/>
+                        <a:srgbClr val="F6EAD5"/>
                       </a:solidFill>
                       <a:prstDash val="solid"/>
                     </a:lnL>
                     <a:lnR w="9525" cap="flat" cmpd="sng" algn="ctr">
                       <a:solidFill>
-                        <a:srgbClr val="F2E5CF"/>
+                        <a:srgbClr val="F6EAD5"/>
                       </a:solidFill>
                       <a:prstDash val="solid"/>
                     </a:lnR>
                     <a:lnT w="9525" cap="flat" cmpd="sng" algn="ctr">
                       <a:solidFill>
-                        <a:srgbClr val="F2E5CF"/>
+                        <a:srgbClr val="F6EAD5"/>
                       </a:solidFill>
                       <a:prstDash val="solid"/>
                     </a:lnT>
                     <a:lnB w="9525" cap="flat" cmpd="sng" algn="ctr">
                       <a:solidFill>
-                        <a:srgbClr val="F2E5CF"/>
+                        <a:srgbClr val="F6EAD5"/>
                       </a:solidFill>
                       <a:prstDash val="solid"/>
                     </a:lnB>
@@ -5009,7 +5223,7 @@
                       <a:r>
                         <a:rPr sz="1400" b="0">
                           <a:solidFill>
-                            <a:srgbClr val="2B2B2B"/>
+                            <a:srgbClr val="26231F"/>
                           </a:solidFill>
                         </a:rPr>
                         <a:t/>
@@ -5019,25 +5233,25 @@
                   <a:tcPr anchor="ctr" marL="73152" marR="73152">
                     <a:lnL w="9525" cap="flat" cmpd="sng" algn="ctr">
                       <a:solidFill>
-                        <a:srgbClr val="F2E5CF"/>
+                        <a:srgbClr val="F6EAD5"/>
                       </a:solidFill>
                       <a:prstDash val="solid"/>
                     </a:lnL>
                     <a:lnR w="9525" cap="flat" cmpd="sng" algn="ctr">
                       <a:solidFill>
-                        <a:srgbClr val="F2E5CF"/>
+                        <a:srgbClr val="F6EAD5"/>
                       </a:solidFill>
                       <a:prstDash val="solid"/>
                     </a:lnR>
                     <a:lnT w="9525" cap="flat" cmpd="sng" algn="ctr">
                       <a:solidFill>
-                        <a:srgbClr val="F2E5CF"/>
+                        <a:srgbClr val="F6EAD5"/>
                       </a:solidFill>
                       <a:prstDash val="solid"/>
                     </a:lnT>
                     <a:lnB w="9525" cap="flat" cmpd="sng" algn="ctr">
                       <a:solidFill>
-                        <a:srgbClr val="F2E5CF"/>
+                        <a:srgbClr val="F6EAD5"/>
                       </a:solidFill>
                       <a:prstDash val="solid"/>
                     </a:lnB>
@@ -5055,7 +5269,7 @@
                       <a:r>
                         <a:rPr sz="1400" b="0">
                           <a:solidFill>
-                            <a:srgbClr val="2B2B2B"/>
+                            <a:srgbClr val="26231F"/>
                           </a:solidFill>
                         </a:rPr>
                         <a:t/>
@@ -5065,25 +5279,25 @@
                   <a:tcPr anchor="ctr" marL="73152" marR="73152">
                     <a:lnL w="9525" cap="flat" cmpd="sng" algn="ctr">
                       <a:solidFill>
-                        <a:srgbClr val="F2E5CF"/>
+                        <a:srgbClr val="F6EAD5"/>
                       </a:solidFill>
                       <a:prstDash val="solid"/>
                     </a:lnL>
                     <a:lnR w="9525" cap="flat" cmpd="sng" algn="ctr">
                       <a:solidFill>
-                        <a:srgbClr val="F2E5CF"/>
+                        <a:srgbClr val="F6EAD5"/>
                       </a:solidFill>
                       <a:prstDash val="solid"/>
                     </a:lnR>
                     <a:lnT w="9525" cap="flat" cmpd="sng" algn="ctr">
                       <a:solidFill>
-                        <a:srgbClr val="F2E5CF"/>
+                        <a:srgbClr val="F6EAD5"/>
                       </a:solidFill>
                       <a:prstDash val="solid"/>
                     </a:lnT>
                     <a:lnB w="9525" cap="flat" cmpd="sng" algn="ctr">
                       <a:solidFill>
-                        <a:srgbClr val="F2E5CF"/>
+                        <a:srgbClr val="F6EAD5"/>
                       </a:solidFill>
                       <a:prstDash val="solid"/>
                     </a:lnB>
@@ -5101,7 +5315,7 @@
                       <a:r>
                         <a:rPr sz="1400" b="0">
                           <a:solidFill>
-                            <a:srgbClr val="2B2B2B"/>
+                            <a:srgbClr val="26231F"/>
                           </a:solidFill>
                         </a:rPr>
                         <a:t/>
@@ -5111,25 +5325,25 @@
                   <a:tcPr anchor="ctr" marL="73152" marR="73152">
                     <a:lnL w="9525" cap="flat" cmpd="sng" algn="ctr">
                       <a:solidFill>
-                        <a:srgbClr val="F2E5CF"/>
+                        <a:srgbClr val="F6EAD5"/>
                       </a:solidFill>
                       <a:prstDash val="solid"/>
                     </a:lnL>
                     <a:lnR w="9525" cap="flat" cmpd="sng" algn="ctr">
                       <a:solidFill>
-                        <a:srgbClr val="F2E5CF"/>
+                        <a:srgbClr val="F6EAD5"/>
                       </a:solidFill>
                       <a:prstDash val="solid"/>
                     </a:lnR>
                     <a:lnT w="9525" cap="flat" cmpd="sng" algn="ctr">
                       <a:solidFill>
-                        <a:srgbClr val="F2E5CF"/>
+                        <a:srgbClr val="F6EAD5"/>
                       </a:solidFill>
                       <a:prstDash val="solid"/>
                     </a:lnT>
                     <a:lnB w="9525" cap="flat" cmpd="sng" algn="ctr">
                       <a:solidFill>
-                        <a:srgbClr val="F2E5CF"/>
+                        <a:srgbClr val="F6EAD5"/>
                       </a:solidFill>
                       <a:prstDash val="solid"/>
                     </a:lnB>
@@ -5149,7 +5363,7 @@
                       <a:r>
                         <a:rPr sz="1400" b="0">
                           <a:solidFill>
-                            <a:srgbClr val="2B2B2B"/>
+                            <a:srgbClr val="26231F"/>
                           </a:solidFill>
                         </a:rPr>
                         <a:t/>
@@ -5159,30 +5373,30 @@
                   <a:tcPr anchor="ctr" marL="73152" marR="73152">
                     <a:lnL w="9525" cap="flat" cmpd="sng" algn="ctr">
                       <a:solidFill>
-                        <a:srgbClr val="F2E5CF"/>
+                        <a:srgbClr val="F6EAD5"/>
                       </a:solidFill>
                       <a:prstDash val="solid"/>
                     </a:lnL>
                     <a:lnR w="9525" cap="flat" cmpd="sng" algn="ctr">
                       <a:solidFill>
-                        <a:srgbClr val="F2E5CF"/>
+                        <a:srgbClr val="F6EAD5"/>
                       </a:solidFill>
                       <a:prstDash val="solid"/>
                     </a:lnR>
                     <a:lnT w="9525" cap="flat" cmpd="sng" algn="ctr">
                       <a:solidFill>
-                        <a:srgbClr val="F2E5CF"/>
+                        <a:srgbClr val="F6EAD5"/>
                       </a:solidFill>
                       <a:prstDash val="solid"/>
                     </a:lnT>
                     <a:lnB w="9525" cap="flat" cmpd="sng" algn="ctr">
                       <a:solidFill>
-                        <a:srgbClr val="F2E5CF"/>
+                        <a:srgbClr val="F6EAD5"/>
                       </a:solidFill>
                       <a:prstDash val="solid"/>
                     </a:lnB>
                     <a:solidFill>
-                      <a:srgbClr val="FAF6EF"/>
+                      <a:srgbClr val="FBF6EC"/>
                     </a:solidFill>
                   </a:tcPr>
                 </a:tc>
@@ -5195,7 +5409,7 @@
                       <a:r>
                         <a:rPr sz="1400" b="0">
                           <a:solidFill>
-                            <a:srgbClr val="2B2B2B"/>
+                            <a:srgbClr val="26231F"/>
                           </a:solidFill>
                         </a:rPr>
                         <a:t/>
@@ -5205,30 +5419,30 @@
                   <a:tcPr anchor="ctr" marL="73152" marR="73152">
                     <a:lnL w="9525" cap="flat" cmpd="sng" algn="ctr">
                       <a:solidFill>
-                        <a:srgbClr val="F2E5CF"/>
+                        <a:srgbClr val="F6EAD5"/>
                       </a:solidFill>
                       <a:prstDash val="solid"/>
                     </a:lnL>
                     <a:lnR w="9525" cap="flat" cmpd="sng" algn="ctr">
                       <a:solidFill>
-                        <a:srgbClr val="F2E5CF"/>
+                        <a:srgbClr val="F6EAD5"/>
                       </a:solidFill>
                       <a:prstDash val="solid"/>
                     </a:lnR>
                     <a:lnT w="9525" cap="flat" cmpd="sng" algn="ctr">
                       <a:solidFill>
-                        <a:srgbClr val="F2E5CF"/>
+                        <a:srgbClr val="F6EAD5"/>
                       </a:solidFill>
                       <a:prstDash val="solid"/>
                     </a:lnT>
                     <a:lnB w="9525" cap="flat" cmpd="sng" algn="ctr">
                       <a:solidFill>
-                        <a:srgbClr val="F2E5CF"/>
+                        <a:srgbClr val="F6EAD5"/>
                       </a:solidFill>
                       <a:prstDash val="solid"/>
                     </a:lnB>
                     <a:solidFill>
-                      <a:srgbClr val="FAF6EF"/>
+                      <a:srgbClr val="FBF6EC"/>
                     </a:solidFill>
                   </a:tcPr>
                 </a:tc>
@@ -5241,7 +5455,7 @@
                       <a:r>
                         <a:rPr sz="1400" b="0">
                           <a:solidFill>
-                            <a:srgbClr val="2B2B2B"/>
+                            <a:srgbClr val="26231F"/>
                           </a:solidFill>
                         </a:rPr>
                         <a:t/>
@@ -5251,30 +5465,30 @@
                   <a:tcPr anchor="ctr" marL="73152" marR="73152">
                     <a:lnL w="9525" cap="flat" cmpd="sng" algn="ctr">
                       <a:solidFill>
-                        <a:srgbClr val="F2E5CF"/>
+                        <a:srgbClr val="F6EAD5"/>
                       </a:solidFill>
                       <a:prstDash val="solid"/>
                     </a:lnL>
                     <a:lnR w="9525" cap="flat" cmpd="sng" algn="ctr">
                       <a:solidFill>
-                        <a:srgbClr val="F2E5CF"/>
+                        <a:srgbClr val="F6EAD5"/>
                       </a:solidFill>
                       <a:prstDash val="solid"/>
                     </a:lnR>
                     <a:lnT w="9525" cap="flat" cmpd="sng" algn="ctr">
                       <a:solidFill>
-                        <a:srgbClr val="F2E5CF"/>
+                        <a:srgbClr val="F6EAD5"/>
                       </a:solidFill>
                       <a:prstDash val="solid"/>
                     </a:lnT>
                     <a:lnB w="9525" cap="flat" cmpd="sng" algn="ctr">
                       <a:solidFill>
-                        <a:srgbClr val="F2E5CF"/>
+                        <a:srgbClr val="F6EAD5"/>
                       </a:solidFill>
                       <a:prstDash val="solid"/>
                     </a:lnB>
                     <a:solidFill>
-                      <a:srgbClr val="FAF6EF"/>
+                      <a:srgbClr val="FBF6EC"/>
                     </a:solidFill>
                   </a:tcPr>
                 </a:tc>
@@ -5287,7 +5501,7 @@
                       <a:r>
                         <a:rPr sz="1400" b="0">
                           <a:solidFill>
-                            <a:srgbClr val="2B2B2B"/>
+                            <a:srgbClr val="26231F"/>
                           </a:solidFill>
                         </a:rPr>
                         <a:t/>
@@ -5297,30 +5511,30 @@
                   <a:tcPr anchor="ctr" marL="73152" marR="73152">
                     <a:lnL w="9525" cap="flat" cmpd="sng" algn="ctr">
                       <a:solidFill>
-                        <a:srgbClr val="F2E5CF"/>
+                        <a:srgbClr val="F6EAD5"/>
                       </a:solidFill>
                       <a:prstDash val="solid"/>
                     </a:lnL>
                     <a:lnR w="9525" cap="flat" cmpd="sng" algn="ctr">
                       <a:solidFill>
-                        <a:srgbClr val="F2E5CF"/>
+                        <a:srgbClr val="F6EAD5"/>
                       </a:solidFill>
                       <a:prstDash val="solid"/>
                     </a:lnR>
                     <a:lnT w="9525" cap="flat" cmpd="sng" algn="ctr">
                       <a:solidFill>
-                        <a:srgbClr val="F2E5CF"/>
+                        <a:srgbClr val="F6EAD5"/>
                       </a:solidFill>
                       <a:prstDash val="solid"/>
                     </a:lnT>
                     <a:lnB w="9525" cap="flat" cmpd="sng" algn="ctr">
                       <a:solidFill>
-                        <a:srgbClr val="F2E5CF"/>
+                        <a:srgbClr val="F6EAD5"/>
                       </a:solidFill>
                       <a:prstDash val="solid"/>
                     </a:lnB>
                     <a:solidFill>
-                      <a:srgbClr val="FAF6EF"/>
+                      <a:srgbClr val="FBF6EC"/>
                     </a:solidFill>
                   </a:tcPr>
                 </a:tc>
@@ -5333,7 +5547,7 @@
                       <a:r>
                         <a:rPr sz="1400" b="0">
                           <a:solidFill>
-                            <a:srgbClr val="2B2B2B"/>
+                            <a:srgbClr val="26231F"/>
                           </a:solidFill>
                         </a:rPr>
                         <a:t/>
@@ -5343,30 +5557,30 @@
                   <a:tcPr anchor="ctr" marL="73152" marR="73152">
                     <a:lnL w="9525" cap="flat" cmpd="sng" algn="ctr">
                       <a:solidFill>
-                        <a:srgbClr val="F2E5CF"/>
+                        <a:srgbClr val="F6EAD5"/>
                       </a:solidFill>
                       <a:prstDash val="solid"/>
                     </a:lnL>
                     <a:lnR w="9525" cap="flat" cmpd="sng" algn="ctr">
                       <a:solidFill>
-                        <a:srgbClr val="F2E5CF"/>
+                        <a:srgbClr val="F6EAD5"/>
                       </a:solidFill>
                       <a:prstDash val="solid"/>
                     </a:lnR>
                     <a:lnT w="9525" cap="flat" cmpd="sng" algn="ctr">
                       <a:solidFill>
-                        <a:srgbClr val="F2E5CF"/>
+                        <a:srgbClr val="F6EAD5"/>
                       </a:solidFill>
                       <a:prstDash val="solid"/>
                     </a:lnT>
                     <a:lnB w="9525" cap="flat" cmpd="sng" algn="ctr">
                       <a:solidFill>
-                        <a:srgbClr val="F2E5CF"/>
+                        <a:srgbClr val="F6EAD5"/>
                       </a:solidFill>
                       <a:prstDash val="solid"/>
                     </a:lnB>
                     <a:solidFill>
-                      <a:srgbClr val="FAF6EF"/>
+                      <a:srgbClr val="FBF6EC"/>
                     </a:solidFill>
                   </a:tcPr>
                 </a:tc>
@@ -5381,7 +5595,7 @@
                       <a:r>
                         <a:rPr sz="1400" b="0">
                           <a:solidFill>
-                            <a:srgbClr val="2B2B2B"/>
+                            <a:srgbClr val="26231F"/>
                           </a:solidFill>
                         </a:rPr>
                         <a:t/>
@@ -5391,25 +5605,25 @@
                   <a:tcPr anchor="ctr" marL="73152" marR="73152">
                     <a:lnL w="9525" cap="flat" cmpd="sng" algn="ctr">
                       <a:solidFill>
-                        <a:srgbClr val="F2E5CF"/>
+                        <a:srgbClr val="F6EAD5"/>
                       </a:solidFill>
                       <a:prstDash val="solid"/>
                     </a:lnL>
                     <a:lnR w="9525" cap="flat" cmpd="sng" algn="ctr">
                       <a:solidFill>
-                        <a:srgbClr val="F2E5CF"/>
+                        <a:srgbClr val="F6EAD5"/>
                       </a:solidFill>
                       <a:prstDash val="solid"/>
                     </a:lnR>
                     <a:lnT w="9525" cap="flat" cmpd="sng" algn="ctr">
                       <a:solidFill>
-                        <a:srgbClr val="F2E5CF"/>
+                        <a:srgbClr val="F6EAD5"/>
                       </a:solidFill>
                       <a:prstDash val="solid"/>
                     </a:lnT>
                     <a:lnB w="9525" cap="flat" cmpd="sng" algn="ctr">
                       <a:solidFill>
-                        <a:srgbClr val="F2E5CF"/>
+                        <a:srgbClr val="F6EAD5"/>
                       </a:solidFill>
                       <a:prstDash val="solid"/>
                     </a:lnB>
@@ -5427,7 +5641,7 @@
                       <a:r>
                         <a:rPr sz="1400" b="0">
                           <a:solidFill>
-                            <a:srgbClr val="2B2B2B"/>
+                            <a:srgbClr val="26231F"/>
                           </a:solidFill>
                         </a:rPr>
                         <a:t/>
@@ -5437,25 +5651,25 @@
                   <a:tcPr anchor="ctr" marL="73152" marR="73152">
                     <a:lnL w="9525" cap="flat" cmpd="sng" algn="ctr">
                       <a:solidFill>
-                        <a:srgbClr val="F2E5CF"/>
+                        <a:srgbClr val="F6EAD5"/>
                       </a:solidFill>
                       <a:prstDash val="solid"/>
                     </a:lnL>
                     <a:lnR w="9525" cap="flat" cmpd="sng" algn="ctr">
                       <a:solidFill>
-                        <a:srgbClr val="F2E5CF"/>
+                        <a:srgbClr val="F6EAD5"/>
                       </a:solidFill>
                       <a:prstDash val="solid"/>
                     </a:lnR>
                     <a:lnT w="9525" cap="flat" cmpd="sng" algn="ctr">
                       <a:solidFill>
-                        <a:srgbClr val="F2E5CF"/>
+                        <a:srgbClr val="F6EAD5"/>
                       </a:solidFill>
                       <a:prstDash val="solid"/>
                     </a:lnT>
                     <a:lnB w="9525" cap="flat" cmpd="sng" algn="ctr">
                       <a:solidFill>
-                        <a:srgbClr val="F2E5CF"/>
+                        <a:srgbClr val="F6EAD5"/>
                       </a:solidFill>
                       <a:prstDash val="solid"/>
                     </a:lnB>
@@ -5473,7 +5687,7 @@
                       <a:r>
                         <a:rPr sz="1400" b="0">
                           <a:solidFill>
-                            <a:srgbClr val="2B2B2B"/>
+                            <a:srgbClr val="26231F"/>
                           </a:solidFill>
                         </a:rPr>
                         <a:t/>
@@ -5483,25 +5697,25 @@
                   <a:tcPr anchor="ctr" marL="73152" marR="73152">
                     <a:lnL w="9525" cap="flat" cmpd="sng" algn="ctr">
                       <a:solidFill>
-                        <a:srgbClr val="F2E5CF"/>
+                        <a:srgbClr val="F6EAD5"/>
                       </a:solidFill>
                       <a:prstDash val="solid"/>
                     </a:lnL>
                     <a:lnR w="9525" cap="flat" cmpd="sng" algn="ctr">
                       <a:solidFill>
-                        <a:srgbClr val="F2E5CF"/>
+                        <a:srgbClr val="F6EAD5"/>
                       </a:solidFill>
                       <a:prstDash val="solid"/>
                     </a:lnR>
                     <a:lnT w="9525" cap="flat" cmpd="sng" algn="ctr">
                       <a:solidFill>
-                        <a:srgbClr val="F2E5CF"/>
+                        <a:srgbClr val="F6EAD5"/>
                       </a:solidFill>
                       <a:prstDash val="solid"/>
                     </a:lnT>
                     <a:lnB w="9525" cap="flat" cmpd="sng" algn="ctr">
                       <a:solidFill>
-                        <a:srgbClr val="F2E5CF"/>
+                        <a:srgbClr val="F6EAD5"/>
                       </a:solidFill>
                       <a:prstDash val="solid"/>
                     </a:lnB>
@@ -5519,7 +5733,7 @@
                       <a:r>
                         <a:rPr sz="1400" b="0">
                           <a:solidFill>
-                            <a:srgbClr val="2B2B2B"/>
+                            <a:srgbClr val="26231F"/>
                           </a:solidFill>
                         </a:rPr>
                         <a:t/>
@@ -5529,25 +5743,25 @@
                   <a:tcPr anchor="ctr" marL="73152" marR="73152">
                     <a:lnL w="9525" cap="flat" cmpd="sng" algn="ctr">
                       <a:solidFill>
-                        <a:srgbClr val="F2E5CF"/>
+                        <a:srgbClr val="F6EAD5"/>
                       </a:solidFill>
                       <a:prstDash val="solid"/>
                     </a:lnL>
                     <a:lnR w="9525" cap="flat" cmpd="sng" algn="ctr">
                       <a:solidFill>
-                        <a:srgbClr val="F2E5CF"/>
+                        <a:srgbClr val="F6EAD5"/>
                       </a:solidFill>
                       <a:prstDash val="solid"/>
                     </a:lnR>
                     <a:lnT w="9525" cap="flat" cmpd="sng" algn="ctr">
                       <a:solidFill>
-                        <a:srgbClr val="F2E5CF"/>
+                        <a:srgbClr val="F6EAD5"/>
                       </a:solidFill>
                       <a:prstDash val="solid"/>
                     </a:lnT>
                     <a:lnB w="9525" cap="flat" cmpd="sng" algn="ctr">
                       <a:solidFill>
-                        <a:srgbClr val="F2E5CF"/>
+                        <a:srgbClr val="F6EAD5"/>
                       </a:solidFill>
                       <a:prstDash val="solid"/>
                     </a:lnB>
@@ -5565,7 +5779,7 @@
                       <a:r>
                         <a:rPr sz="1400" b="0">
                           <a:solidFill>
-                            <a:srgbClr val="2B2B2B"/>
+                            <a:srgbClr val="26231F"/>
                           </a:solidFill>
                         </a:rPr>
                         <a:t/>
@@ -5575,25 +5789,25 @@
                   <a:tcPr anchor="ctr" marL="73152" marR="73152">
                     <a:lnL w="9525" cap="flat" cmpd="sng" algn="ctr">
                       <a:solidFill>
-                        <a:srgbClr val="F2E5CF"/>
+                        <a:srgbClr val="F6EAD5"/>
                       </a:solidFill>
                       <a:prstDash val="solid"/>
                     </a:lnL>
                     <a:lnR w="9525" cap="flat" cmpd="sng" algn="ctr">
                       <a:solidFill>
-                        <a:srgbClr val="F2E5CF"/>
+                        <a:srgbClr val="F6EAD5"/>
                       </a:solidFill>
                       <a:prstDash val="solid"/>
                     </a:lnR>
                     <a:lnT w="9525" cap="flat" cmpd="sng" algn="ctr">
                       <a:solidFill>
-                        <a:srgbClr val="F2E5CF"/>
+                        <a:srgbClr val="F6EAD5"/>
                       </a:solidFill>
                       <a:prstDash val="solid"/>
                     </a:lnT>
                     <a:lnB w="9525" cap="flat" cmpd="sng" algn="ctr">
                       <a:solidFill>
-                        <a:srgbClr val="F2E5CF"/>
+                        <a:srgbClr val="F6EAD5"/>
                       </a:solidFill>
                       <a:prstDash val="solid"/>
                     </a:lnB>
@@ -5613,7 +5827,7 @@
                       <a:r>
                         <a:rPr sz="1400" b="0">
                           <a:solidFill>
-                            <a:srgbClr val="2B2B2B"/>
+                            <a:srgbClr val="26231F"/>
                           </a:solidFill>
                         </a:rPr>
                         <a:t/>
@@ -5623,30 +5837,30 @@
                   <a:tcPr anchor="ctr" marL="73152" marR="73152">
                     <a:lnL w="9525" cap="flat" cmpd="sng" algn="ctr">
                       <a:solidFill>
-                        <a:srgbClr val="F2E5CF"/>
+                        <a:srgbClr val="F6EAD5"/>
                       </a:solidFill>
                       <a:prstDash val="solid"/>
                     </a:lnL>
                     <a:lnR w="9525" cap="flat" cmpd="sng" algn="ctr">
                       <a:solidFill>
-                        <a:srgbClr val="F2E5CF"/>
+                        <a:srgbClr val="F6EAD5"/>
                       </a:solidFill>
                       <a:prstDash val="solid"/>
                     </a:lnR>
                     <a:lnT w="9525" cap="flat" cmpd="sng" algn="ctr">
                       <a:solidFill>
-                        <a:srgbClr val="F2E5CF"/>
+                        <a:srgbClr val="F6EAD5"/>
                       </a:solidFill>
                       <a:prstDash val="solid"/>
                     </a:lnT>
                     <a:lnB w="9525" cap="flat" cmpd="sng" algn="ctr">
                       <a:solidFill>
-                        <a:srgbClr val="F2E5CF"/>
+                        <a:srgbClr val="F6EAD5"/>
                       </a:solidFill>
                       <a:prstDash val="solid"/>
                     </a:lnB>
                     <a:solidFill>
-                      <a:srgbClr val="FAF6EF"/>
+                      <a:srgbClr val="FBF6EC"/>
                     </a:solidFill>
                   </a:tcPr>
                 </a:tc>
@@ -5659,7 +5873,7 @@
                       <a:r>
                         <a:rPr sz="1400" b="0">
                           <a:solidFill>
-                            <a:srgbClr val="2B2B2B"/>
+                            <a:srgbClr val="26231F"/>
                           </a:solidFill>
                         </a:rPr>
                         <a:t/>
@@ -5669,30 +5883,30 @@
                   <a:tcPr anchor="ctr" marL="73152" marR="73152">
                     <a:lnL w="9525" cap="flat" cmpd="sng" algn="ctr">
                       <a:solidFill>
-                        <a:srgbClr val="F2E5CF"/>
+                        <a:srgbClr val="F6EAD5"/>
                       </a:solidFill>
                       <a:prstDash val="solid"/>
                     </a:lnL>
                     <a:lnR w="9525" cap="flat" cmpd="sng" algn="ctr">
                       <a:solidFill>
-                        <a:srgbClr val="F2E5CF"/>
+                        <a:srgbClr val="F6EAD5"/>
                       </a:solidFill>
                       <a:prstDash val="solid"/>
                     </a:lnR>
                     <a:lnT w="9525" cap="flat" cmpd="sng" algn="ctr">
                       <a:solidFill>
-                        <a:srgbClr val="F2E5CF"/>
+                        <a:srgbClr val="F6EAD5"/>
                       </a:solidFill>
                       <a:prstDash val="solid"/>
                     </a:lnT>
                     <a:lnB w="9525" cap="flat" cmpd="sng" algn="ctr">
                       <a:solidFill>
-                        <a:srgbClr val="F2E5CF"/>
+                        <a:srgbClr val="F6EAD5"/>
                       </a:solidFill>
                       <a:prstDash val="solid"/>
                     </a:lnB>
                     <a:solidFill>
-                      <a:srgbClr val="FAF6EF"/>
+                      <a:srgbClr val="FBF6EC"/>
                     </a:solidFill>
                   </a:tcPr>
                 </a:tc>
@@ -5705,7 +5919,7 @@
                       <a:r>
                         <a:rPr sz="1400" b="0">
                           <a:solidFill>
-                            <a:srgbClr val="2B2B2B"/>
+                            <a:srgbClr val="26231F"/>
                           </a:solidFill>
                         </a:rPr>
                         <a:t/>
@@ -5715,30 +5929,30 @@
                   <a:tcPr anchor="ctr" marL="73152" marR="73152">
                     <a:lnL w="9525" cap="flat" cmpd="sng" algn="ctr">
                       <a:solidFill>
-                        <a:srgbClr val="F2E5CF"/>
+                        <a:srgbClr val="F6EAD5"/>
                       </a:solidFill>
                       <a:prstDash val="solid"/>
                     </a:lnL>
                     <a:lnR w="9525" cap="flat" cmpd="sng" algn="ctr">
                       <a:solidFill>
-                        <a:srgbClr val="F2E5CF"/>
+                        <a:srgbClr val="F6EAD5"/>
                       </a:solidFill>
                       <a:prstDash val="solid"/>
                     </a:lnR>
                     <a:lnT w="9525" cap="flat" cmpd="sng" algn="ctr">
                       <a:solidFill>
-                        <a:srgbClr val="F2E5CF"/>
+                        <a:srgbClr val="F6EAD5"/>
                       </a:solidFill>
                       <a:prstDash val="solid"/>
                     </a:lnT>
                     <a:lnB w="9525" cap="flat" cmpd="sng" algn="ctr">
                       <a:solidFill>
-                        <a:srgbClr val="F2E5CF"/>
+                        <a:srgbClr val="F6EAD5"/>
                       </a:solidFill>
                       <a:prstDash val="solid"/>
                     </a:lnB>
                     <a:solidFill>
-                      <a:srgbClr val="FAF6EF"/>
+                      <a:srgbClr val="FBF6EC"/>
                     </a:solidFill>
                   </a:tcPr>
                 </a:tc>
@@ -5751,7 +5965,7 @@
                       <a:r>
                         <a:rPr sz="1400" b="0">
                           <a:solidFill>
-                            <a:srgbClr val="2B2B2B"/>
+                            <a:srgbClr val="26231F"/>
                           </a:solidFill>
                         </a:rPr>
                         <a:t/>
@@ -5761,30 +5975,30 @@
                   <a:tcPr anchor="ctr" marL="73152" marR="73152">
                     <a:lnL w="9525" cap="flat" cmpd="sng" algn="ctr">
                       <a:solidFill>
-                        <a:srgbClr val="F2E5CF"/>
+                        <a:srgbClr val="F6EAD5"/>
                       </a:solidFill>
                       <a:prstDash val="solid"/>
                     </a:lnL>
                     <a:lnR w="9525" cap="flat" cmpd="sng" algn="ctr">
                       <a:solidFill>
-                        <a:srgbClr val="F2E5CF"/>
+                        <a:srgbClr val="F6EAD5"/>
                       </a:solidFill>
                       <a:prstDash val="solid"/>
                     </a:lnR>
                     <a:lnT w="9525" cap="flat" cmpd="sng" algn="ctr">
                       <a:solidFill>
-                        <a:srgbClr val="F2E5CF"/>
+                        <a:srgbClr val="F6EAD5"/>
                       </a:solidFill>
                       <a:prstDash val="solid"/>
                     </a:lnT>
                     <a:lnB w="9525" cap="flat" cmpd="sng" algn="ctr">
                       <a:solidFill>
-                        <a:srgbClr val="F2E5CF"/>
+                        <a:srgbClr val="F6EAD5"/>
                       </a:solidFill>
                       <a:prstDash val="solid"/>
                     </a:lnB>
                     <a:solidFill>
-                      <a:srgbClr val="FAF6EF"/>
+                      <a:srgbClr val="FBF6EC"/>
                     </a:solidFill>
                   </a:tcPr>
                 </a:tc>
@@ -5797,7 +6011,7 @@
                       <a:r>
                         <a:rPr sz="1400" b="0">
                           <a:solidFill>
-                            <a:srgbClr val="2B2B2B"/>
+                            <a:srgbClr val="26231F"/>
                           </a:solidFill>
                         </a:rPr>
                         <a:t/>
@@ -5807,30 +6021,30 @@
                   <a:tcPr anchor="ctr" marL="73152" marR="73152">
                     <a:lnL w="9525" cap="flat" cmpd="sng" algn="ctr">
                       <a:solidFill>
-                        <a:srgbClr val="F2E5CF"/>
+                        <a:srgbClr val="F6EAD5"/>
                       </a:solidFill>
                       <a:prstDash val="solid"/>
                     </a:lnL>
                     <a:lnR w="9525" cap="flat" cmpd="sng" algn="ctr">
                       <a:solidFill>
-                        <a:srgbClr val="F2E5CF"/>
+                        <a:srgbClr val="F6EAD5"/>
                       </a:solidFill>
                       <a:prstDash val="solid"/>
                     </a:lnR>
                     <a:lnT w="9525" cap="flat" cmpd="sng" algn="ctr">
                       <a:solidFill>
-                        <a:srgbClr val="F2E5CF"/>
+                        <a:srgbClr val="F6EAD5"/>
                       </a:solidFill>
                       <a:prstDash val="solid"/>
                     </a:lnT>
                     <a:lnB w="9525" cap="flat" cmpd="sng" algn="ctr">
                       <a:solidFill>
-                        <a:srgbClr val="F2E5CF"/>
+                        <a:srgbClr val="F6EAD5"/>
                       </a:solidFill>
                       <a:prstDash val="solid"/>
                     </a:lnB>
                     <a:solidFill>
-                      <a:srgbClr val="FAF6EF"/>
+                      <a:srgbClr val="FBF6EC"/>
                     </a:solidFill>
                   </a:tcPr>
                 </a:tc>
@@ -5853,7 +6067,7 @@
     <p:bg>
       <p:bgPr>
         <a:solidFill>
-          <a:srgbClr val="FAF6EF"/>
+          <a:srgbClr val="FFFFFF"/>
         </a:solidFill>
         <a:effectLst/>
       </p:bgPr>
@@ -5873,14 +6087,14 @@
         </p:nvSpPr>
         <p:spPr>
           <a:xfrm>
-            <a:off x="0" y="0"/>
-            <a:ext cx="12191695" cy="274320"/>
+            <a:off x="0" y="6565392"/>
+            <a:ext cx="12191695" cy="292608"/>
           </a:xfrm>
           <a:prstGeom prst="rect">
             <a:avLst/>
           </a:prstGeom>
           <a:solidFill>
-            <a:srgbClr val="C49645"/>
+            <a:srgbClr val="EBD4AD"/>
           </a:solidFill>
           <a:ln>
             <a:noFill/>
@@ -5896,20 +6110,49 @@
       </p:sp>
       <p:sp>
         <p:nvSpPr>
-          <p:cNvPr id="4" name="장식"/>
+          <p:cNvPr id="4" name="포인트"/>
           <p:cNvSpPr/>
           <p:nvPr/>
         </p:nvSpPr>
         <p:spPr>
           <a:xfrm>
-            <a:off x="0" y="274320"/>
-            <a:ext cx="12191695" cy="54864"/>
+            <a:off x="5958687" y="246888"/>
+            <a:ext cx="274320" cy="109728"/>
+          </a:xfrm>
+          <a:prstGeom prst="wave">
+            <a:avLst/>
+          </a:prstGeom>
+          <a:solidFill>
+            <a:srgbClr val="E1C698"/>
+          </a:solidFill>
+          <a:ln>
+            <a:noFill/>
+          </a:ln>
+        </p:spPr>
+        <p:txBody>
+          <a:bodyPr rtlCol="0" anchor="ctr"/>
+          <a:lstStyle/>
+          <a:p>
+            <a:pPr algn="ctr"/>
+          </a:p>
+        </p:txBody>
+      </p:sp>
+      <p:sp>
+        <p:nvSpPr>
+          <p:cNvPr id="5" name="장식"/>
+          <p:cNvSpPr/>
+          <p:nvPr/>
+        </p:nvSpPr>
+        <p:spPr>
+          <a:xfrm>
+            <a:off x="5684367" y="1572768"/>
+            <a:ext cx="822960" cy="22860"/>
           </a:xfrm>
           <a:prstGeom prst="rect">
             <a:avLst/>
           </a:prstGeom>
           <a:solidFill>
-            <a:srgbClr val="3B8591"/>
+            <a:srgbClr val="E1C698"/>
           </a:solidFill>
           <a:ln>
             <a:noFill/>
@@ -5920,6 +6163,44 @@
           <a:lstStyle/>
           <a:p>
             <a:pPr algn="ctr"/>
+          </a:p>
+        </p:txBody>
+      </p:sp>
+      <p:sp>
+        <p:nvSpPr>
+          <p:cNvPr id="6" name="상단 라벨"/>
+          <p:cNvSpPr txBox="1"/>
+          <p:nvPr/>
+        </p:nvSpPr>
+        <p:spPr>
+          <a:xfrm>
+            <a:off x="640080" y="182880"/>
+            <a:ext cx="3657600" cy="274320"/>
+          </a:xfrm>
+          <a:prstGeom prst="rect">
+            <a:avLst/>
+          </a:prstGeom>
+          <a:noFill/>
+        </p:spPr>
+        <p:txBody>
+          <a:bodyPr wrap="square" lIns="54864" rIns="54864" tIns="27432" bIns="27432" anchor="ctr">
+            <a:noAutofit/>
+          </a:bodyPr>
+          <a:lstStyle/>
+          <a:p>
+            <a:pPr algn="l">
+              <a:lnSpc>
+                <a:spcPct val="115000"/>
+              </a:lnSpc>
+            </a:pPr>
+            <a:r>
+              <a:rPr sz="800" b="1" i="0" spc="250">
+                <a:solidFill>
+                  <a:srgbClr val="8E8780"/>
+                </a:solidFill>
+              </a:rPr>
+              <a:t>INSURANCE CHECK</a:t>
+            </a:r>
           </a:p>
         </p:txBody>
       </p:sp>
@@ -5935,8 +6216,8 @@
         </p:nvSpPr>
         <p:spPr>
           <a:xfrm>
-            <a:off x="640080" y="457200"/>
-            <a:ext cx="9722815" cy="868680"/>
+            <a:off x="1371600" y="640080"/>
+            <a:ext cx="9448495" cy="868680"/>
           </a:xfrm>
         </p:spPr>
         <p:txBody>
@@ -5945,7 +6226,7 @@
           </a:bodyPr>
           <a:lstStyle/>
           <a:p>
-            <a:pPr algn="l">
+            <a:pPr algn="ctr">
               <a:lnSpc>
                 <a:spcPct val="105000"/>
               </a:lnSpc>
@@ -5953,7 +6234,7 @@
             <a:r>
               <a:rPr sz="3000" b="1" i="0">
                 <a:solidFill>
-                  <a:srgbClr val="7C5D27"/>
+                  <a:srgbClr val="26231F"/>
                 </a:solidFill>
               </a:rPr>
               <a:t>보장 항목 체크</a:t>
@@ -5963,14 +6244,14 @@
       </p:sp>
       <p:graphicFrame>
         <p:nvGraphicFramePr>
-          <p:cNvPr id="5" name="표"/>
+          <p:cNvPr id="7" name="표"/>
           <p:cNvGraphicFramePr>
             <a:graphicFrameLocks noGrp="1"/>
           </p:cNvGraphicFramePr>
           <p:nvPr/>
         </p:nvGraphicFramePr>
         <p:xfrm>
-          <a:off x="640080" y="1600200"/>
+          <a:off x="640080" y="1783080"/>
           <a:ext cx="10911534" cy="4773168"/>
         </p:xfrm>
         <a:graphic>
@@ -5995,7 +6276,7 @@
                       <a:r>
                         <a:rPr sz="1400" b="1">
                           <a:solidFill>
-                            <a:srgbClr val="FFFFFF"/>
+                            <a:srgbClr val="26231F"/>
                           </a:solidFill>
                         </a:rPr>
                         <a:t>보장 항목</a:t>
@@ -6005,30 +6286,30 @@
                   <a:tcPr anchor="ctr" marL="73152" marR="73152">
                     <a:lnL w="9525" cap="flat" cmpd="sng" algn="ctr">
                       <a:solidFill>
-                        <a:srgbClr val="C49645"/>
+                        <a:srgbClr val="E1C698"/>
                       </a:solidFill>
                       <a:prstDash val="solid"/>
                     </a:lnL>
                     <a:lnR w="9525" cap="flat" cmpd="sng" algn="ctr">
                       <a:solidFill>
-                        <a:srgbClr val="C49645"/>
+                        <a:srgbClr val="E1C698"/>
                       </a:solidFill>
                       <a:prstDash val="solid"/>
                     </a:lnR>
                     <a:lnT w="9525" cap="flat" cmpd="sng" algn="ctr">
                       <a:solidFill>
-                        <a:srgbClr val="C49645"/>
+                        <a:srgbClr val="E1C698"/>
                       </a:solidFill>
                       <a:prstDash val="solid"/>
                     </a:lnT>
                     <a:lnB w="9525" cap="flat" cmpd="sng" algn="ctr">
                       <a:solidFill>
-                        <a:srgbClr val="C49645"/>
+                        <a:srgbClr val="E1C698"/>
                       </a:solidFill>
                       <a:prstDash val="solid"/>
                     </a:lnB>
                     <a:solidFill>
-                      <a:srgbClr val="C49645"/>
+                      <a:srgbClr val="E1C698"/>
                     </a:solidFill>
                   </a:tcPr>
                 </a:tc>
@@ -6041,7 +6322,7 @@
                       <a:r>
                         <a:rPr sz="1400" b="1">
                           <a:solidFill>
-                            <a:srgbClr val="FFFFFF"/>
+                            <a:srgbClr val="26231F"/>
                           </a:solidFill>
                         </a:rPr>
                         <a:t>가입 확인</a:t>
@@ -6051,30 +6332,30 @@
                   <a:tcPr anchor="ctr" marL="73152" marR="73152">
                     <a:lnL w="9525" cap="flat" cmpd="sng" algn="ctr">
                       <a:solidFill>
-                        <a:srgbClr val="C49645"/>
+                        <a:srgbClr val="E1C698"/>
                       </a:solidFill>
                       <a:prstDash val="solid"/>
                     </a:lnL>
                     <a:lnR w="9525" cap="flat" cmpd="sng" algn="ctr">
                       <a:solidFill>
-                        <a:srgbClr val="C49645"/>
+                        <a:srgbClr val="E1C698"/>
                       </a:solidFill>
                       <a:prstDash val="solid"/>
                     </a:lnR>
                     <a:lnT w="9525" cap="flat" cmpd="sng" algn="ctr">
                       <a:solidFill>
-                        <a:srgbClr val="C49645"/>
+                        <a:srgbClr val="E1C698"/>
                       </a:solidFill>
                       <a:prstDash val="solid"/>
                     </a:lnT>
                     <a:lnB w="9525" cap="flat" cmpd="sng" algn="ctr">
                       <a:solidFill>
-                        <a:srgbClr val="C49645"/>
+                        <a:srgbClr val="E1C698"/>
                       </a:solidFill>
                       <a:prstDash val="solid"/>
                     </a:lnB>
                     <a:solidFill>
-                      <a:srgbClr val="C49645"/>
+                      <a:srgbClr val="E1C698"/>
                     </a:solidFill>
                   </a:tcPr>
                 </a:tc>
@@ -6087,7 +6368,7 @@
                       <a:r>
                         <a:rPr sz="1400" b="1">
                           <a:solidFill>
-                            <a:srgbClr val="FFFFFF"/>
+                            <a:srgbClr val="26231F"/>
                           </a:solidFill>
                         </a:rPr>
                         <a:t>확인 필요</a:t>
@@ -6097,30 +6378,30 @@
                   <a:tcPr anchor="ctr" marL="73152" marR="73152">
                     <a:lnL w="9525" cap="flat" cmpd="sng" algn="ctr">
                       <a:solidFill>
-                        <a:srgbClr val="C49645"/>
+                        <a:srgbClr val="E1C698"/>
                       </a:solidFill>
                       <a:prstDash val="solid"/>
                     </a:lnL>
                     <a:lnR w="9525" cap="flat" cmpd="sng" algn="ctr">
                       <a:solidFill>
-                        <a:srgbClr val="C49645"/>
+                        <a:srgbClr val="E1C698"/>
                       </a:solidFill>
                       <a:prstDash val="solid"/>
                     </a:lnR>
                     <a:lnT w="9525" cap="flat" cmpd="sng" algn="ctr">
                       <a:solidFill>
-                        <a:srgbClr val="C49645"/>
+                        <a:srgbClr val="E1C698"/>
                       </a:solidFill>
                       <a:prstDash val="solid"/>
                     </a:lnT>
                     <a:lnB w="9525" cap="flat" cmpd="sng" algn="ctr">
                       <a:solidFill>
-                        <a:srgbClr val="C49645"/>
+                        <a:srgbClr val="E1C698"/>
                       </a:solidFill>
                       <a:prstDash val="solid"/>
                     </a:lnB>
                     <a:solidFill>
-                      <a:srgbClr val="C49645"/>
+                      <a:srgbClr val="E1C698"/>
                     </a:solidFill>
                   </a:tcPr>
                 </a:tc>
@@ -6133,7 +6414,7 @@
                       <a:r>
                         <a:rPr sz="1400" b="1">
                           <a:solidFill>
-                            <a:srgbClr val="FFFFFF"/>
+                            <a:srgbClr val="26231F"/>
                           </a:solidFill>
                         </a:rPr>
                         <a:t>해당 없음</a:t>
@@ -6143,30 +6424,30 @@
                   <a:tcPr anchor="ctr" marL="73152" marR="73152">
                     <a:lnL w="9525" cap="flat" cmpd="sng" algn="ctr">
                       <a:solidFill>
-                        <a:srgbClr val="C49645"/>
+                        <a:srgbClr val="E1C698"/>
                       </a:solidFill>
                       <a:prstDash val="solid"/>
                     </a:lnL>
                     <a:lnR w="9525" cap="flat" cmpd="sng" algn="ctr">
                       <a:solidFill>
-                        <a:srgbClr val="C49645"/>
+                        <a:srgbClr val="E1C698"/>
                       </a:solidFill>
                       <a:prstDash val="solid"/>
                     </a:lnR>
                     <a:lnT w="9525" cap="flat" cmpd="sng" algn="ctr">
                       <a:solidFill>
-                        <a:srgbClr val="C49645"/>
+                        <a:srgbClr val="E1C698"/>
                       </a:solidFill>
                       <a:prstDash val="solid"/>
                     </a:lnT>
                     <a:lnB w="9525" cap="flat" cmpd="sng" algn="ctr">
                       <a:solidFill>
-                        <a:srgbClr val="C49645"/>
+                        <a:srgbClr val="E1C698"/>
                       </a:solidFill>
                       <a:prstDash val="solid"/>
                     </a:lnB>
                     <a:solidFill>
-                      <a:srgbClr val="C49645"/>
+                      <a:srgbClr val="E1C698"/>
                     </a:solidFill>
                   </a:tcPr>
                 </a:tc>
@@ -6181,7 +6462,7 @@
                       <a:r>
                         <a:rPr sz="1400" b="1">
                           <a:solidFill>
-                            <a:srgbClr val="7C5D27"/>
+                            <a:srgbClr val="493D27"/>
                           </a:solidFill>
                         </a:rPr>
                         <a:t>사망·재해</a:t>
@@ -6191,30 +6472,30 @@
                   <a:tcPr anchor="ctr" marL="73152" marR="73152">
                     <a:lnL w="9525" cap="flat" cmpd="sng" algn="ctr">
                       <a:solidFill>
-                        <a:srgbClr val="F2E5CF"/>
+                        <a:srgbClr val="F6EAD5"/>
                       </a:solidFill>
                       <a:prstDash val="solid"/>
                     </a:lnL>
                     <a:lnR w="9525" cap="flat" cmpd="sng" algn="ctr">
                       <a:solidFill>
-                        <a:srgbClr val="F2E5CF"/>
+                        <a:srgbClr val="F6EAD5"/>
                       </a:solidFill>
                       <a:prstDash val="solid"/>
                     </a:lnR>
                     <a:lnT w="9525" cap="flat" cmpd="sng" algn="ctr">
                       <a:solidFill>
-                        <a:srgbClr val="F2E5CF"/>
+                        <a:srgbClr val="F6EAD5"/>
                       </a:solidFill>
                       <a:prstDash val="solid"/>
                     </a:lnT>
                     <a:lnB w="9525" cap="flat" cmpd="sng" algn="ctr">
                       <a:solidFill>
-                        <a:srgbClr val="F2E5CF"/>
+                        <a:srgbClr val="F6EAD5"/>
                       </a:solidFill>
                       <a:prstDash val="solid"/>
                     </a:lnB>
                     <a:solidFill>
-                      <a:srgbClr val="F2E5CF"/>
+                      <a:srgbClr val="F6EAD5"/>
                     </a:solidFill>
                   </a:tcPr>
                 </a:tc>
@@ -6227,7 +6508,7 @@
                       <a:r>
                         <a:rPr sz="1400" b="0">
                           <a:solidFill>
-                            <a:srgbClr val="2B2B2B"/>
+                            <a:srgbClr val="26231F"/>
                           </a:solidFill>
                         </a:rPr>
                         <a:t>□</a:t>
@@ -6237,25 +6518,25 @@
                   <a:tcPr anchor="ctr" marL="73152" marR="73152">
                     <a:lnL w="9525" cap="flat" cmpd="sng" algn="ctr">
                       <a:solidFill>
-                        <a:srgbClr val="F2E5CF"/>
+                        <a:srgbClr val="F6EAD5"/>
                       </a:solidFill>
                       <a:prstDash val="solid"/>
                     </a:lnL>
                     <a:lnR w="9525" cap="flat" cmpd="sng" algn="ctr">
                       <a:solidFill>
-                        <a:srgbClr val="F2E5CF"/>
+                        <a:srgbClr val="F6EAD5"/>
                       </a:solidFill>
                       <a:prstDash val="solid"/>
                     </a:lnR>
                     <a:lnT w="9525" cap="flat" cmpd="sng" algn="ctr">
                       <a:solidFill>
-                        <a:srgbClr val="F2E5CF"/>
+                        <a:srgbClr val="F6EAD5"/>
                       </a:solidFill>
                       <a:prstDash val="solid"/>
                     </a:lnT>
                     <a:lnB w="9525" cap="flat" cmpd="sng" algn="ctr">
                       <a:solidFill>
-                        <a:srgbClr val="F2E5CF"/>
+                        <a:srgbClr val="F6EAD5"/>
                       </a:solidFill>
                       <a:prstDash val="solid"/>
                     </a:lnB>
@@ -6273,7 +6554,7 @@
                       <a:r>
                         <a:rPr sz="1400" b="0">
                           <a:solidFill>
-                            <a:srgbClr val="2B2B2B"/>
+                            <a:srgbClr val="26231F"/>
                           </a:solidFill>
                         </a:rPr>
                         <a:t>□</a:t>
@@ -6283,25 +6564,25 @@
                   <a:tcPr anchor="ctr" marL="73152" marR="73152">
                     <a:lnL w="9525" cap="flat" cmpd="sng" algn="ctr">
                       <a:solidFill>
-                        <a:srgbClr val="F2E5CF"/>
+                        <a:srgbClr val="F6EAD5"/>
                       </a:solidFill>
                       <a:prstDash val="solid"/>
                     </a:lnL>
                     <a:lnR w="9525" cap="flat" cmpd="sng" algn="ctr">
                       <a:solidFill>
-                        <a:srgbClr val="F2E5CF"/>
+                        <a:srgbClr val="F6EAD5"/>
                       </a:solidFill>
                       <a:prstDash val="solid"/>
                     </a:lnR>
                     <a:lnT w="9525" cap="flat" cmpd="sng" algn="ctr">
                       <a:solidFill>
-                        <a:srgbClr val="F2E5CF"/>
+                        <a:srgbClr val="F6EAD5"/>
                       </a:solidFill>
                       <a:prstDash val="solid"/>
                     </a:lnT>
                     <a:lnB w="9525" cap="flat" cmpd="sng" algn="ctr">
                       <a:solidFill>
-                        <a:srgbClr val="F2E5CF"/>
+                        <a:srgbClr val="F6EAD5"/>
                       </a:solidFill>
                       <a:prstDash val="solid"/>
                     </a:lnB>
@@ -6319,7 +6600,7 @@
                       <a:r>
                         <a:rPr sz="1400" b="0">
                           <a:solidFill>
-                            <a:srgbClr val="2B2B2B"/>
+                            <a:srgbClr val="26231F"/>
                           </a:solidFill>
                         </a:rPr>
                         <a:t>□</a:t>
@@ -6329,25 +6610,25 @@
                   <a:tcPr anchor="ctr" marL="73152" marR="73152">
                     <a:lnL w="9525" cap="flat" cmpd="sng" algn="ctr">
                       <a:solidFill>
-                        <a:srgbClr val="F2E5CF"/>
+                        <a:srgbClr val="F6EAD5"/>
                       </a:solidFill>
                       <a:prstDash val="solid"/>
                     </a:lnL>
                     <a:lnR w="9525" cap="flat" cmpd="sng" algn="ctr">
                       <a:solidFill>
-                        <a:srgbClr val="F2E5CF"/>
+                        <a:srgbClr val="F6EAD5"/>
                       </a:solidFill>
                       <a:prstDash val="solid"/>
                     </a:lnR>
                     <a:lnT w="9525" cap="flat" cmpd="sng" algn="ctr">
                       <a:solidFill>
-                        <a:srgbClr val="F2E5CF"/>
+                        <a:srgbClr val="F6EAD5"/>
                       </a:solidFill>
                       <a:prstDash val="solid"/>
                     </a:lnT>
                     <a:lnB w="9525" cap="flat" cmpd="sng" algn="ctr">
                       <a:solidFill>
-                        <a:srgbClr val="F2E5CF"/>
+                        <a:srgbClr val="F6EAD5"/>
                       </a:solidFill>
                       <a:prstDash val="solid"/>
                     </a:lnB>
@@ -6367,7 +6648,7 @@
                       <a:r>
                         <a:rPr sz="1400" b="1">
                           <a:solidFill>
-                            <a:srgbClr val="7C5D27"/>
+                            <a:srgbClr val="493D27"/>
                           </a:solidFill>
                         </a:rPr>
                         <a:t>질병 진단</a:t>
@@ -6377,30 +6658,30 @@
                   <a:tcPr anchor="ctr" marL="73152" marR="73152">
                     <a:lnL w="9525" cap="flat" cmpd="sng" algn="ctr">
                       <a:solidFill>
-                        <a:srgbClr val="F2E5CF"/>
+                        <a:srgbClr val="F6EAD5"/>
                       </a:solidFill>
                       <a:prstDash val="solid"/>
                     </a:lnL>
                     <a:lnR w="9525" cap="flat" cmpd="sng" algn="ctr">
                       <a:solidFill>
-                        <a:srgbClr val="F2E5CF"/>
+                        <a:srgbClr val="F6EAD5"/>
                       </a:solidFill>
                       <a:prstDash val="solid"/>
                     </a:lnR>
                     <a:lnT w="9525" cap="flat" cmpd="sng" algn="ctr">
                       <a:solidFill>
-                        <a:srgbClr val="F2E5CF"/>
+                        <a:srgbClr val="F6EAD5"/>
                       </a:solidFill>
                       <a:prstDash val="solid"/>
                     </a:lnT>
                     <a:lnB w="9525" cap="flat" cmpd="sng" algn="ctr">
                       <a:solidFill>
-                        <a:srgbClr val="F2E5CF"/>
+                        <a:srgbClr val="F6EAD5"/>
                       </a:solidFill>
                       <a:prstDash val="solid"/>
                     </a:lnB>
                     <a:solidFill>
-                      <a:srgbClr val="F2E5CF"/>
+                      <a:srgbClr val="F6EAD5"/>
                     </a:solidFill>
                   </a:tcPr>
                 </a:tc>
@@ -6413,7 +6694,7 @@
                       <a:r>
                         <a:rPr sz="1400" b="0">
                           <a:solidFill>
-                            <a:srgbClr val="2B2B2B"/>
+                            <a:srgbClr val="26231F"/>
                           </a:solidFill>
                         </a:rPr>
                         <a:t>□</a:t>
@@ -6423,30 +6704,30 @@
                   <a:tcPr anchor="ctr" marL="73152" marR="73152">
                     <a:lnL w="9525" cap="flat" cmpd="sng" algn="ctr">
                       <a:solidFill>
-                        <a:srgbClr val="F2E5CF"/>
+                        <a:srgbClr val="F6EAD5"/>
                       </a:solidFill>
                       <a:prstDash val="solid"/>
                     </a:lnL>
                     <a:lnR w="9525" cap="flat" cmpd="sng" algn="ctr">
                       <a:solidFill>
-                        <a:srgbClr val="F2E5CF"/>
+                        <a:srgbClr val="F6EAD5"/>
                       </a:solidFill>
                       <a:prstDash val="solid"/>
                     </a:lnR>
                     <a:lnT w="9525" cap="flat" cmpd="sng" algn="ctr">
                       <a:solidFill>
-                        <a:srgbClr val="F2E5CF"/>
+                        <a:srgbClr val="F6EAD5"/>
                       </a:solidFill>
                       <a:prstDash val="solid"/>
                     </a:lnT>
                     <a:lnB w="9525" cap="flat" cmpd="sng" algn="ctr">
                       <a:solidFill>
-                        <a:srgbClr val="F2E5CF"/>
+                        <a:srgbClr val="F6EAD5"/>
                       </a:solidFill>
                       <a:prstDash val="solid"/>
                     </a:lnB>
                     <a:solidFill>
-                      <a:srgbClr val="FAF6EF"/>
+                      <a:srgbClr val="FBF6EC"/>
                     </a:solidFill>
                   </a:tcPr>
                 </a:tc>
@@ -6459,7 +6740,7 @@
                       <a:r>
                         <a:rPr sz="1400" b="0">
                           <a:solidFill>
-                            <a:srgbClr val="2B2B2B"/>
+                            <a:srgbClr val="26231F"/>
                           </a:solidFill>
                         </a:rPr>
                         <a:t>□</a:t>
@@ -6469,30 +6750,30 @@
                   <a:tcPr anchor="ctr" marL="73152" marR="73152">
                     <a:lnL w="9525" cap="flat" cmpd="sng" algn="ctr">
                       <a:solidFill>
-                        <a:srgbClr val="F2E5CF"/>
+                        <a:srgbClr val="F6EAD5"/>
                       </a:solidFill>
                       <a:prstDash val="solid"/>
                     </a:lnL>
                     <a:lnR w="9525" cap="flat" cmpd="sng" algn="ctr">
                       <a:solidFill>
-                        <a:srgbClr val="F2E5CF"/>
+                        <a:srgbClr val="F6EAD5"/>
                       </a:solidFill>
                       <a:prstDash val="solid"/>
                     </a:lnR>
                     <a:lnT w="9525" cap="flat" cmpd="sng" algn="ctr">
                       <a:solidFill>
-                        <a:srgbClr val="F2E5CF"/>
+                        <a:srgbClr val="F6EAD5"/>
                       </a:solidFill>
                       <a:prstDash val="solid"/>
                     </a:lnT>
                     <a:lnB w="9525" cap="flat" cmpd="sng" algn="ctr">
                       <a:solidFill>
-                        <a:srgbClr val="F2E5CF"/>
+                        <a:srgbClr val="F6EAD5"/>
                       </a:solidFill>
                       <a:prstDash val="solid"/>
                     </a:lnB>
                     <a:solidFill>
-                      <a:srgbClr val="FAF6EF"/>
+                      <a:srgbClr val="FBF6EC"/>
                     </a:solidFill>
                   </a:tcPr>
                 </a:tc>
@@ -6505,7 +6786,7 @@
                       <a:r>
                         <a:rPr sz="1400" b="0">
                           <a:solidFill>
-                            <a:srgbClr val="2B2B2B"/>
+                            <a:srgbClr val="26231F"/>
                           </a:solidFill>
                         </a:rPr>
                         <a:t>□</a:t>
@@ -6515,30 +6796,30 @@
                   <a:tcPr anchor="ctr" marL="73152" marR="73152">
                     <a:lnL w="9525" cap="flat" cmpd="sng" algn="ctr">
                       <a:solidFill>
-                        <a:srgbClr val="F2E5CF"/>
+                        <a:srgbClr val="F6EAD5"/>
                       </a:solidFill>
                       <a:prstDash val="solid"/>
                     </a:lnL>
                     <a:lnR w="9525" cap="flat" cmpd="sng" algn="ctr">
                       <a:solidFill>
-                        <a:srgbClr val="F2E5CF"/>
+                        <a:srgbClr val="F6EAD5"/>
                       </a:solidFill>
                       <a:prstDash val="solid"/>
                     </a:lnR>
                     <a:lnT w="9525" cap="flat" cmpd="sng" algn="ctr">
                       <a:solidFill>
-                        <a:srgbClr val="F2E5CF"/>
+                        <a:srgbClr val="F6EAD5"/>
                       </a:solidFill>
                       <a:prstDash val="solid"/>
                     </a:lnT>
                     <a:lnB w="9525" cap="flat" cmpd="sng" algn="ctr">
                       <a:solidFill>
-                        <a:srgbClr val="F2E5CF"/>
+                        <a:srgbClr val="F6EAD5"/>
                       </a:solidFill>
                       <a:prstDash val="solid"/>
                     </a:lnB>
                     <a:solidFill>
-                      <a:srgbClr val="FAF6EF"/>
+                      <a:srgbClr val="FBF6EC"/>
                     </a:solidFill>
                   </a:tcPr>
                 </a:tc>
@@ -6553,7 +6834,7 @@
                       <a:r>
                         <a:rPr sz="1400" b="1">
                           <a:solidFill>
-                            <a:srgbClr val="7C5D27"/>
+                            <a:srgbClr val="493D27"/>
                           </a:solidFill>
                         </a:rPr>
                         <a:t>암</a:t>
@@ -6563,30 +6844,30 @@
                   <a:tcPr anchor="ctr" marL="73152" marR="73152">
                     <a:lnL w="9525" cap="flat" cmpd="sng" algn="ctr">
                       <a:solidFill>
-                        <a:srgbClr val="F2E5CF"/>
+                        <a:srgbClr val="F6EAD5"/>
                       </a:solidFill>
                       <a:prstDash val="solid"/>
                     </a:lnL>
                     <a:lnR w="9525" cap="flat" cmpd="sng" algn="ctr">
                       <a:solidFill>
-                        <a:srgbClr val="F2E5CF"/>
+                        <a:srgbClr val="F6EAD5"/>
                       </a:solidFill>
                       <a:prstDash val="solid"/>
                     </a:lnR>
                     <a:lnT w="9525" cap="flat" cmpd="sng" algn="ctr">
                       <a:solidFill>
-                        <a:srgbClr val="F2E5CF"/>
+                        <a:srgbClr val="F6EAD5"/>
                       </a:solidFill>
                       <a:prstDash val="solid"/>
                     </a:lnT>
                     <a:lnB w="9525" cap="flat" cmpd="sng" algn="ctr">
                       <a:solidFill>
-                        <a:srgbClr val="F2E5CF"/>
+                        <a:srgbClr val="F6EAD5"/>
                       </a:solidFill>
                       <a:prstDash val="solid"/>
                     </a:lnB>
                     <a:solidFill>
-                      <a:srgbClr val="F2E5CF"/>
+                      <a:srgbClr val="F6EAD5"/>
                     </a:solidFill>
                   </a:tcPr>
                 </a:tc>
@@ -6599,7 +6880,7 @@
                       <a:r>
                         <a:rPr sz="1400" b="0">
                           <a:solidFill>
-                            <a:srgbClr val="2B2B2B"/>
+                            <a:srgbClr val="26231F"/>
                           </a:solidFill>
                         </a:rPr>
                         <a:t>□</a:t>
@@ -6609,25 +6890,25 @@
                   <a:tcPr anchor="ctr" marL="73152" marR="73152">
                     <a:lnL w="9525" cap="flat" cmpd="sng" algn="ctr">
                       <a:solidFill>
-                        <a:srgbClr val="F2E5CF"/>
+                        <a:srgbClr val="F6EAD5"/>
                       </a:solidFill>
                       <a:prstDash val="solid"/>
                     </a:lnL>
                     <a:lnR w="9525" cap="flat" cmpd="sng" algn="ctr">
                       <a:solidFill>
-                        <a:srgbClr val="F2E5CF"/>
+                        <a:srgbClr val="F6EAD5"/>
                       </a:solidFill>
                       <a:prstDash val="solid"/>
                     </a:lnR>
                     <a:lnT w="9525" cap="flat" cmpd="sng" algn="ctr">
                       <a:solidFill>
-                        <a:srgbClr val="F2E5CF"/>
+                        <a:srgbClr val="F6EAD5"/>
                       </a:solidFill>
                       <a:prstDash val="solid"/>
                     </a:lnT>
                     <a:lnB w="9525" cap="flat" cmpd="sng" algn="ctr">
                       <a:solidFill>
-                        <a:srgbClr val="F2E5CF"/>
+                        <a:srgbClr val="F6EAD5"/>
                       </a:solidFill>
                       <a:prstDash val="solid"/>
                     </a:lnB>
@@ -6645,7 +6926,7 @@
                       <a:r>
                         <a:rPr sz="1400" b="0">
                           <a:solidFill>
-                            <a:srgbClr val="2B2B2B"/>
+                            <a:srgbClr val="26231F"/>
                           </a:solidFill>
                         </a:rPr>
                         <a:t>□</a:t>
@@ -6655,25 +6936,25 @@
                   <a:tcPr anchor="ctr" marL="73152" marR="73152">
                     <a:lnL w="9525" cap="flat" cmpd="sng" algn="ctr">
                       <a:solidFill>
-                        <a:srgbClr val="F2E5CF"/>
+                        <a:srgbClr val="F6EAD5"/>
                       </a:solidFill>
                       <a:prstDash val="solid"/>
                     </a:lnL>
                     <a:lnR w="9525" cap="flat" cmpd="sng" algn="ctr">
                       <a:solidFill>
-                        <a:srgbClr val="F2E5CF"/>
+                        <a:srgbClr val="F6EAD5"/>
                       </a:solidFill>
                       <a:prstDash val="solid"/>
                     </a:lnR>
                     <a:lnT w="9525" cap="flat" cmpd="sng" algn="ctr">
                       <a:solidFill>
-                        <a:srgbClr val="F2E5CF"/>
+                        <a:srgbClr val="F6EAD5"/>
                       </a:solidFill>
                       <a:prstDash val="solid"/>
                     </a:lnT>
                     <a:lnB w="9525" cap="flat" cmpd="sng" algn="ctr">
                       <a:solidFill>
-                        <a:srgbClr val="F2E5CF"/>
+                        <a:srgbClr val="F6EAD5"/>
                       </a:solidFill>
                       <a:prstDash val="solid"/>
                     </a:lnB>
@@ -6691,7 +6972,7 @@
                       <a:r>
                         <a:rPr sz="1400" b="0">
                           <a:solidFill>
-                            <a:srgbClr val="2B2B2B"/>
+                            <a:srgbClr val="26231F"/>
                           </a:solidFill>
                         </a:rPr>
                         <a:t>□</a:t>
@@ -6701,25 +6982,25 @@
                   <a:tcPr anchor="ctr" marL="73152" marR="73152">
                     <a:lnL w="9525" cap="flat" cmpd="sng" algn="ctr">
                       <a:solidFill>
-                        <a:srgbClr val="F2E5CF"/>
+                        <a:srgbClr val="F6EAD5"/>
                       </a:solidFill>
                       <a:prstDash val="solid"/>
                     </a:lnL>
                     <a:lnR w="9525" cap="flat" cmpd="sng" algn="ctr">
                       <a:solidFill>
-                        <a:srgbClr val="F2E5CF"/>
+                        <a:srgbClr val="F6EAD5"/>
                       </a:solidFill>
                       <a:prstDash val="solid"/>
                     </a:lnR>
                     <a:lnT w="9525" cap="flat" cmpd="sng" algn="ctr">
                       <a:solidFill>
-                        <a:srgbClr val="F2E5CF"/>
+                        <a:srgbClr val="F6EAD5"/>
                       </a:solidFill>
                       <a:prstDash val="solid"/>
                     </a:lnT>
                     <a:lnB w="9525" cap="flat" cmpd="sng" algn="ctr">
                       <a:solidFill>
-                        <a:srgbClr val="F2E5CF"/>
+                        <a:srgbClr val="F6EAD5"/>
                       </a:solidFill>
                       <a:prstDash val="solid"/>
                     </a:lnB>
@@ -6739,7 +7020,7 @@
                       <a:r>
                         <a:rPr sz="1400" b="1">
                           <a:solidFill>
-                            <a:srgbClr val="7C5D27"/>
+                            <a:srgbClr val="493D27"/>
                           </a:solidFill>
                         </a:rPr>
                         <a:t>뇌·심장</a:t>
@@ -6749,30 +7030,30 @@
                   <a:tcPr anchor="ctr" marL="73152" marR="73152">
                     <a:lnL w="9525" cap="flat" cmpd="sng" algn="ctr">
                       <a:solidFill>
-                        <a:srgbClr val="F2E5CF"/>
+                        <a:srgbClr val="F6EAD5"/>
                       </a:solidFill>
                       <a:prstDash val="solid"/>
                     </a:lnL>
                     <a:lnR w="9525" cap="flat" cmpd="sng" algn="ctr">
                       <a:solidFill>
-                        <a:srgbClr val="F2E5CF"/>
+                        <a:srgbClr val="F6EAD5"/>
                       </a:solidFill>
                       <a:prstDash val="solid"/>
                     </a:lnR>
                     <a:lnT w="9525" cap="flat" cmpd="sng" algn="ctr">
                       <a:solidFill>
-                        <a:srgbClr val="F2E5CF"/>
+                        <a:srgbClr val="F6EAD5"/>
                       </a:solidFill>
                       <a:prstDash val="solid"/>
                     </a:lnT>
                     <a:lnB w="9525" cap="flat" cmpd="sng" algn="ctr">
                       <a:solidFill>
-                        <a:srgbClr val="F2E5CF"/>
+                        <a:srgbClr val="F6EAD5"/>
                       </a:solidFill>
                       <a:prstDash val="solid"/>
                     </a:lnB>
                     <a:solidFill>
-                      <a:srgbClr val="F2E5CF"/>
+                      <a:srgbClr val="F6EAD5"/>
                     </a:solidFill>
                   </a:tcPr>
                 </a:tc>
@@ -6785,7 +7066,7 @@
                       <a:r>
                         <a:rPr sz="1400" b="0">
                           <a:solidFill>
-                            <a:srgbClr val="2B2B2B"/>
+                            <a:srgbClr val="26231F"/>
                           </a:solidFill>
                         </a:rPr>
                         <a:t>□</a:t>
@@ -6795,30 +7076,30 @@
                   <a:tcPr anchor="ctr" marL="73152" marR="73152">
                     <a:lnL w="9525" cap="flat" cmpd="sng" algn="ctr">
                       <a:solidFill>
-                        <a:srgbClr val="F2E5CF"/>
+                        <a:srgbClr val="F6EAD5"/>
                       </a:solidFill>
                       <a:prstDash val="solid"/>
                     </a:lnL>
                     <a:lnR w="9525" cap="flat" cmpd="sng" algn="ctr">
                       <a:solidFill>
-                        <a:srgbClr val="F2E5CF"/>
+                        <a:srgbClr val="F6EAD5"/>
                       </a:solidFill>
                       <a:prstDash val="solid"/>
                     </a:lnR>
                     <a:lnT w="9525" cap="flat" cmpd="sng" algn="ctr">
                       <a:solidFill>
-                        <a:srgbClr val="F2E5CF"/>
+                        <a:srgbClr val="F6EAD5"/>
                       </a:solidFill>
                       <a:prstDash val="solid"/>
                     </a:lnT>
                     <a:lnB w="9525" cap="flat" cmpd="sng" algn="ctr">
                       <a:solidFill>
-                        <a:srgbClr val="F2E5CF"/>
+                        <a:srgbClr val="F6EAD5"/>
                       </a:solidFill>
                       <a:prstDash val="solid"/>
                     </a:lnB>
                     <a:solidFill>
-                      <a:srgbClr val="FAF6EF"/>
+                      <a:srgbClr val="FBF6EC"/>
                     </a:solidFill>
                   </a:tcPr>
                 </a:tc>
@@ -6831,7 +7112,7 @@
                       <a:r>
                         <a:rPr sz="1400" b="0">
                           <a:solidFill>
-                            <a:srgbClr val="2B2B2B"/>
+                            <a:srgbClr val="26231F"/>
                           </a:solidFill>
                         </a:rPr>
                         <a:t>□</a:t>
@@ -6841,30 +7122,30 @@
                   <a:tcPr anchor="ctr" marL="73152" marR="73152">
                     <a:lnL w="9525" cap="flat" cmpd="sng" algn="ctr">
                       <a:solidFill>
-                        <a:srgbClr val="F2E5CF"/>
+                        <a:srgbClr val="F6EAD5"/>
                       </a:solidFill>
                       <a:prstDash val="solid"/>
                     </a:lnL>
                     <a:lnR w="9525" cap="flat" cmpd="sng" algn="ctr">
                       <a:solidFill>
-                        <a:srgbClr val="F2E5CF"/>
+                        <a:srgbClr val="F6EAD5"/>
                       </a:solidFill>
                       <a:prstDash val="solid"/>
                     </a:lnR>
                     <a:lnT w="9525" cap="flat" cmpd="sng" algn="ctr">
                       <a:solidFill>
-                        <a:srgbClr val="F2E5CF"/>
+                        <a:srgbClr val="F6EAD5"/>
                       </a:solidFill>
                       <a:prstDash val="solid"/>
                     </a:lnT>
                     <a:lnB w="9525" cap="flat" cmpd="sng" algn="ctr">
                       <a:solidFill>
-                        <a:srgbClr val="F2E5CF"/>
+                        <a:srgbClr val="F6EAD5"/>
                       </a:solidFill>
                       <a:prstDash val="solid"/>
                     </a:lnB>
                     <a:solidFill>
-                      <a:srgbClr val="FAF6EF"/>
+                      <a:srgbClr val="FBF6EC"/>
                     </a:solidFill>
                   </a:tcPr>
                 </a:tc>
@@ -6877,7 +7158,7 @@
                       <a:r>
                         <a:rPr sz="1400" b="0">
                           <a:solidFill>
-                            <a:srgbClr val="2B2B2B"/>
+                            <a:srgbClr val="26231F"/>
                           </a:solidFill>
                         </a:rPr>
                         <a:t>□</a:t>
@@ -6887,30 +7168,30 @@
                   <a:tcPr anchor="ctr" marL="73152" marR="73152">
                     <a:lnL w="9525" cap="flat" cmpd="sng" algn="ctr">
                       <a:solidFill>
-                        <a:srgbClr val="F2E5CF"/>
+                        <a:srgbClr val="F6EAD5"/>
                       </a:solidFill>
                       <a:prstDash val="solid"/>
                     </a:lnL>
                     <a:lnR w="9525" cap="flat" cmpd="sng" algn="ctr">
                       <a:solidFill>
-                        <a:srgbClr val="F2E5CF"/>
+                        <a:srgbClr val="F6EAD5"/>
                       </a:solidFill>
                       <a:prstDash val="solid"/>
                     </a:lnR>
                     <a:lnT w="9525" cap="flat" cmpd="sng" algn="ctr">
                       <a:solidFill>
-                        <a:srgbClr val="F2E5CF"/>
+                        <a:srgbClr val="F6EAD5"/>
                       </a:solidFill>
                       <a:prstDash val="solid"/>
                     </a:lnT>
                     <a:lnB w="9525" cap="flat" cmpd="sng" algn="ctr">
                       <a:solidFill>
-                        <a:srgbClr val="F2E5CF"/>
+                        <a:srgbClr val="F6EAD5"/>
                       </a:solidFill>
                       <a:prstDash val="solid"/>
                     </a:lnB>
                     <a:solidFill>
-                      <a:srgbClr val="FAF6EF"/>
+                      <a:srgbClr val="FBF6EC"/>
                     </a:solidFill>
                   </a:tcPr>
                 </a:tc>
@@ -6925,7 +7206,7 @@
                       <a:r>
                         <a:rPr sz="1400" b="1">
                           <a:solidFill>
-                            <a:srgbClr val="7C5D27"/>
+                            <a:srgbClr val="493D27"/>
                           </a:solidFill>
                         </a:rPr>
                         <a:t>입원·수술</a:t>
@@ -6935,30 +7216,30 @@
                   <a:tcPr anchor="ctr" marL="73152" marR="73152">
                     <a:lnL w="9525" cap="flat" cmpd="sng" algn="ctr">
                       <a:solidFill>
-                        <a:srgbClr val="F2E5CF"/>
+                        <a:srgbClr val="F6EAD5"/>
                       </a:solidFill>
                       <a:prstDash val="solid"/>
                     </a:lnL>
                     <a:lnR w="9525" cap="flat" cmpd="sng" algn="ctr">
                       <a:solidFill>
-                        <a:srgbClr val="F2E5CF"/>
+                        <a:srgbClr val="F6EAD5"/>
                       </a:solidFill>
                       <a:prstDash val="solid"/>
                     </a:lnR>
                     <a:lnT w="9525" cap="flat" cmpd="sng" algn="ctr">
                       <a:solidFill>
-                        <a:srgbClr val="F2E5CF"/>
+                        <a:srgbClr val="F6EAD5"/>
                       </a:solidFill>
                       <a:prstDash val="solid"/>
                     </a:lnT>
                     <a:lnB w="9525" cap="flat" cmpd="sng" algn="ctr">
                       <a:solidFill>
-                        <a:srgbClr val="F2E5CF"/>
+                        <a:srgbClr val="F6EAD5"/>
                       </a:solidFill>
                       <a:prstDash val="solid"/>
                     </a:lnB>
                     <a:solidFill>
-                      <a:srgbClr val="F2E5CF"/>
+                      <a:srgbClr val="F6EAD5"/>
                     </a:solidFill>
                   </a:tcPr>
                 </a:tc>
@@ -6971,7 +7252,7 @@
                       <a:r>
                         <a:rPr sz="1400" b="0">
                           <a:solidFill>
-                            <a:srgbClr val="2B2B2B"/>
+                            <a:srgbClr val="26231F"/>
                           </a:solidFill>
                         </a:rPr>
                         <a:t>□</a:t>
@@ -6981,25 +7262,25 @@
                   <a:tcPr anchor="ctr" marL="73152" marR="73152">
                     <a:lnL w="9525" cap="flat" cmpd="sng" algn="ctr">
                       <a:solidFill>
-                        <a:srgbClr val="F2E5CF"/>
+                        <a:srgbClr val="F6EAD5"/>
                       </a:solidFill>
                       <a:prstDash val="solid"/>
                     </a:lnL>
                     <a:lnR w="9525" cap="flat" cmpd="sng" algn="ctr">
                       <a:solidFill>
-                        <a:srgbClr val="F2E5CF"/>
+                        <a:srgbClr val="F6EAD5"/>
                       </a:solidFill>
                       <a:prstDash val="solid"/>
                     </a:lnR>
                     <a:lnT w="9525" cap="flat" cmpd="sng" algn="ctr">
                       <a:solidFill>
-                        <a:srgbClr val="F2E5CF"/>
+                        <a:srgbClr val="F6EAD5"/>
                       </a:solidFill>
                       <a:prstDash val="solid"/>
                     </a:lnT>
                     <a:lnB w="9525" cap="flat" cmpd="sng" algn="ctr">
                       <a:solidFill>
-                        <a:srgbClr val="F2E5CF"/>
+                        <a:srgbClr val="F6EAD5"/>
                       </a:solidFill>
                       <a:prstDash val="solid"/>
                     </a:lnB>
@@ -7017,7 +7298,7 @@
                       <a:r>
                         <a:rPr sz="1400" b="0">
                           <a:solidFill>
-                            <a:srgbClr val="2B2B2B"/>
+                            <a:srgbClr val="26231F"/>
                           </a:solidFill>
                         </a:rPr>
                         <a:t>□</a:t>
@@ -7027,25 +7308,25 @@
                   <a:tcPr anchor="ctr" marL="73152" marR="73152">
                     <a:lnL w="9525" cap="flat" cmpd="sng" algn="ctr">
                       <a:solidFill>
-                        <a:srgbClr val="F2E5CF"/>
+                        <a:srgbClr val="F6EAD5"/>
                       </a:solidFill>
                       <a:prstDash val="solid"/>
                     </a:lnL>
                     <a:lnR w="9525" cap="flat" cmpd="sng" algn="ctr">
                       <a:solidFill>
-                        <a:srgbClr val="F2E5CF"/>
+                        <a:srgbClr val="F6EAD5"/>
                       </a:solidFill>
                       <a:prstDash val="solid"/>
                     </a:lnR>
                     <a:lnT w="9525" cap="flat" cmpd="sng" algn="ctr">
                       <a:solidFill>
-                        <a:srgbClr val="F2E5CF"/>
+                        <a:srgbClr val="F6EAD5"/>
                       </a:solidFill>
                       <a:prstDash val="solid"/>
                     </a:lnT>
                     <a:lnB w="9525" cap="flat" cmpd="sng" algn="ctr">
                       <a:solidFill>
-                        <a:srgbClr val="F2E5CF"/>
+                        <a:srgbClr val="F6EAD5"/>
                       </a:solidFill>
                       <a:prstDash val="solid"/>
                     </a:lnB>
@@ -7063,7 +7344,7 @@
                       <a:r>
                         <a:rPr sz="1400" b="0">
                           <a:solidFill>
-                            <a:srgbClr val="2B2B2B"/>
+                            <a:srgbClr val="26231F"/>
                           </a:solidFill>
                         </a:rPr>
                         <a:t>□</a:t>
@@ -7073,25 +7354,25 @@
                   <a:tcPr anchor="ctr" marL="73152" marR="73152">
                     <a:lnL w="9525" cap="flat" cmpd="sng" algn="ctr">
                       <a:solidFill>
-                        <a:srgbClr val="F2E5CF"/>
+                        <a:srgbClr val="F6EAD5"/>
                       </a:solidFill>
                       <a:prstDash val="solid"/>
                     </a:lnL>
                     <a:lnR w="9525" cap="flat" cmpd="sng" algn="ctr">
                       <a:solidFill>
-                        <a:srgbClr val="F2E5CF"/>
+                        <a:srgbClr val="F6EAD5"/>
                       </a:solidFill>
                       <a:prstDash val="solid"/>
                     </a:lnR>
                     <a:lnT w="9525" cap="flat" cmpd="sng" algn="ctr">
                       <a:solidFill>
-                        <a:srgbClr val="F2E5CF"/>
+                        <a:srgbClr val="F6EAD5"/>
                       </a:solidFill>
                       <a:prstDash val="solid"/>
                     </a:lnT>
                     <a:lnB w="9525" cap="flat" cmpd="sng" algn="ctr">
                       <a:solidFill>
-                        <a:srgbClr val="F2E5CF"/>
+                        <a:srgbClr val="F6EAD5"/>
                       </a:solidFill>
                       <a:prstDash val="solid"/>
                     </a:lnB>
@@ -7111,7 +7392,7 @@
                       <a:r>
                         <a:rPr sz="1400" b="1">
                           <a:solidFill>
-                            <a:srgbClr val="7C5D27"/>
+                            <a:srgbClr val="493D27"/>
                           </a:solidFill>
                         </a:rPr>
                         <a:t>상해</a:t>
@@ -7121,30 +7402,30 @@
                   <a:tcPr anchor="ctr" marL="73152" marR="73152">
                     <a:lnL w="9525" cap="flat" cmpd="sng" algn="ctr">
                       <a:solidFill>
-                        <a:srgbClr val="F2E5CF"/>
+                        <a:srgbClr val="F6EAD5"/>
                       </a:solidFill>
                       <a:prstDash val="solid"/>
                     </a:lnL>
                     <a:lnR w="9525" cap="flat" cmpd="sng" algn="ctr">
                       <a:solidFill>
-                        <a:srgbClr val="F2E5CF"/>
+                        <a:srgbClr val="F6EAD5"/>
                       </a:solidFill>
                       <a:prstDash val="solid"/>
                     </a:lnR>
                     <a:lnT w="9525" cap="flat" cmpd="sng" algn="ctr">
                       <a:solidFill>
-                        <a:srgbClr val="F2E5CF"/>
+                        <a:srgbClr val="F6EAD5"/>
                       </a:solidFill>
                       <a:prstDash val="solid"/>
                     </a:lnT>
                     <a:lnB w="9525" cap="flat" cmpd="sng" algn="ctr">
                       <a:solidFill>
-                        <a:srgbClr val="F2E5CF"/>
+                        <a:srgbClr val="F6EAD5"/>
                       </a:solidFill>
                       <a:prstDash val="solid"/>
                     </a:lnB>
                     <a:solidFill>
-                      <a:srgbClr val="F2E5CF"/>
+                      <a:srgbClr val="F6EAD5"/>
                     </a:solidFill>
                   </a:tcPr>
                 </a:tc>
@@ -7157,7 +7438,7 @@
                       <a:r>
                         <a:rPr sz="1400" b="0">
                           <a:solidFill>
-                            <a:srgbClr val="2B2B2B"/>
+                            <a:srgbClr val="26231F"/>
                           </a:solidFill>
                         </a:rPr>
                         <a:t>□</a:t>
@@ -7167,30 +7448,30 @@
                   <a:tcPr anchor="ctr" marL="73152" marR="73152">
                     <a:lnL w="9525" cap="flat" cmpd="sng" algn="ctr">
                       <a:solidFill>
-                        <a:srgbClr val="F2E5CF"/>
+                        <a:srgbClr val="F6EAD5"/>
                       </a:solidFill>
                       <a:prstDash val="solid"/>
                     </a:lnL>
                     <a:lnR w="9525" cap="flat" cmpd="sng" algn="ctr">
                       <a:solidFill>
-                        <a:srgbClr val="F2E5CF"/>
+                        <a:srgbClr val="F6EAD5"/>
                       </a:solidFill>
                       <a:prstDash val="solid"/>
                     </a:lnR>
                     <a:lnT w="9525" cap="flat" cmpd="sng" algn="ctr">
                       <a:solidFill>
-                        <a:srgbClr val="F2E5CF"/>
+                        <a:srgbClr val="F6EAD5"/>
                       </a:solidFill>
                       <a:prstDash val="solid"/>
                     </a:lnT>
                     <a:lnB w="9525" cap="flat" cmpd="sng" algn="ctr">
                       <a:solidFill>
-                        <a:srgbClr val="F2E5CF"/>
+                        <a:srgbClr val="F6EAD5"/>
                       </a:solidFill>
                       <a:prstDash val="solid"/>
                     </a:lnB>
                     <a:solidFill>
-                      <a:srgbClr val="FAF6EF"/>
+                      <a:srgbClr val="FBF6EC"/>
                     </a:solidFill>
                   </a:tcPr>
                 </a:tc>
@@ -7203,7 +7484,7 @@
                       <a:r>
                         <a:rPr sz="1400" b="0">
                           <a:solidFill>
-                            <a:srgbClr val="2B2B2B"/>
+                            <a:srgbClr val="26231F"/>
                           </a:solidFill>
                         </a:rPr>
                         <a:t>□</a:t>
@@ -7213,30 +7494,30 @@
                   <a:tcPr anchor="ctr" marL="73152" marR="73152">
                     <a:lnL w="9525" cap="flat" cmpd="sng" algn="ctr">
                       <a:solidFill>
-                        <a:srgbClr val="F2E5CF"/>
+                        <a:srgbClr val="F6EAD5"/>
                       </a:solidFill>
                       <a:prstDash val="solid"/>
                     </a:lnL>
                     <a:lnR w="9525" cap="flat" cmpd="sng" algn="ctr">
                       <a:solidFill>
-                        <a:srgbClr val="F2E5CF"/>
+                        <a:srgbClr val="F6EAD5"/>
                       </a:solidFill>
                       <a:prstDash val="solid"/>
                     </a:lnR>
                     <a:lnT w="9525" cap="flat" cmpd="sng" algn="ctr">
                       <a:solidFill>
-                        <a:srgbClr val="F2E5CF"/>
+                        <a:srgbClr val="F6EAD5"/>
                       </a:solidFill>
                       <a:prstDash val="solid"/>
                     </a:lnT>
                     <a:lnB w="9525" cap="flat" cmpd="sng" algn="ctr">
                       <a:solidFill>
-                        <a:srgbClr val="F2E5CF"/>
+                        <a:srgbClr val="F6EAD5"/>
                       </a:solidFill>
                       <a:prstDash val="solid"/>
                     </a:lnB>
                     <a:solidFill>
-                      <a:srgbClr val="FAF6EF"/>
+                      <a:srgbClr val="FBF6EC"/>
                     </a:solidFill>
                   </a:tcPr>
                 </a:tc>
@@ -7249,7 +7530,7 @@
                       <a:r>
                         <a:rPr sz="1400" b="0">
                           <a:solidFill>
-                            <a:srgbClr val="2B2B2B"/>
+                            <a:srgbClr val="26231F"/>
                           </a:solidFill>
                         </a:rPr>
                         <a:t>□</a:t>
@@ -7259,30 +7540,30 @@
                   <a:tcPr anchor="ctr" marL="73152" marR="73152">
                     <a:lnL w="9525" cap="flat" cmpd="sng" algn="ctr">
                       <a:solidFill>
-                        <a:srgbClr val="F2E5CF"/>
+                        <a:srgbClr val="F6EAD5"/>
                       </a:solidFill>
                       <a:prstDash val="solid"/>
                     </a:lnL>
                     <a:lnR w="9525" cap="flat" cmpd="sng" algn="ctr">
                       <a:solidFill>
-                        <a:srgbClr val="F2E5CF"/>
+                        <a:srgbClr val="F6EAD5"/>
                       </a:solidFill>
                       <a:prstDash val="solid"/>
                     </a:lnR>
                     <a:lnT w="9525" cap="flat" cmpd="sng" algn="ctr">
                       <a:solidFill>
-                        <a:srgbClr val="F2E5CF"/>
+                        <a:srgbClr val="F6EAD5"/>
                       </a:solidFill>
                       <a:prstDash val="solid"/>
                     </a:lnT>
                     <a:lnB w="9525" cap="flat" cmpd="sng" algn="ctr">
                       <a:solidFill>
-                        <a:srgbClr val="F2E5CF"/>
+                        <a:srgbClr val="F6EAD5"/>
                       </a:solidFill>
                       <a:prstDash val="solid"/>
                     </a:lnB>
                     <a:solidFill>
-                      <a:srgbClr val="FAF6EF"/>
+                      <a:srgbClr val="FBF6EC"/>
                     </a:solidFill>
                   </a:tcPr>
                 </a:tc>
@@ -7297,7 +7578,7 @@
                       <a:r>
                         <a:rPr sz="1400" b="1">
                           <a:solidFill>
-                            <a:srgbClr val="7C5D27"/>
+                            <a:srgbClr val="493D27"/>
                           </a:solidFill>
                         </a:rPr>
                         <a:t>실손의료</a:t>
@@ -7307,30 +7588,30 @@
                   <a:tcPr anchor="ctr" marL="73152" marR="73152">
                     <a:lnL w="9525" cap="flat" cmpd="sng" algn="ctr">
                       <a:solidFill>
-                        <a:srgbClr val="F2E5CF"/>
+                        <a:srgbClr val="F6EAD5"/>
                       </a:solidFill>
                       <a:prstDash val="solid"/>
                     </a:lnL>
                     <a:lnR w="9525" cap="flat" cmpd="sng" algn="ctr">
                       <a:solidFill>
-                        <a:srgbClr val="F2E5CF"/>
+                        <a:srgbClr val="F6EAD5"/>
                       </a:solidFill>
                       <a:prstDash val="solid"/>
                     </a:lnR>
                     <a:lnT w="9525" cap="flat" cmpd="sng" algn="ctr">
                       <a:solidFill>
-                        <a:srgbClr val="F2E5CF"/>
+                        <a:srgbClr val="F6EAD5"/>
                       </a:solidFill>
                       <a:prstDash val="solid"/>
                     </a:lnT>
                     <a:lnB w="9525" cap="flat" cmpd="sng" algn="ctr">
                       <a:solidFill>
-                        <a:srgbClr val="F2E5CF"/>
+                        <a:srgbClr val="F6EAD5"/>
                       </a:solidFill>
                       <a:prstDash val="solid"/>
                     </a:lnB>
                     <a:solidFill>
-                      <a:srgbClr val="F2E5CF"/>
+                      <a:srgbClr val="F6EAD5"/>
                     </a:solidFill>
                   </a:tcPr>
                 </a:tc>
@@ -7343,7 +7624,7 @@
                       <a:r>
                         <a:rPr sz="1400" b="0">
                           <a:solidFill>
-                            <a:srgbClr val="2B2B2B"/>
+                            <a:srgbClr val="26231F"/>
                           </a:solidFill>
                         </a:rPr>
                         <a:t>□</a:t>
@@ -7353,25 +7634,25 @@
                   <a:tcPr anchor="ctr" marL="73152" marR="73152">
                     <a:lnL w="9525" cap="flat" cmpd="sng" algn="ctr">
                       <a:solidFill>
-                        <a:srgbClr val="F2E5CF"/>
+                        <a:srgbClr val="F6EAD5"/>
                       </a:solidFill>
                       <a:prstDash val="solid"/>
                     </a:lnL>
                     <a:lnR w="9525" cap="flat" cmpd="sng" algn="ctr">
                       <a:solidFill>
-                        <a:srgbClr val="F2E5CF"/>
+                        <a:srgbClr val="F6EAD5"/>
                       </a:solidFill>
                       <a:prstDash val="solid"/>
                     </a:lnR>
                     <a:lnT w="9525" cap="flat" cmpd="sng" algn="ctr">
                       <a:solidFill>
-                        <a:srgbClr val="F2E5CF"/>
+                        <a:srgbClr val="F6EAD5"/>
                       </a:solidFill>
                       <a:prstDash val="solid"/>
                     </a:lnT>
                     <a:lnB w="9525" cap="flat" cmpd="sng" algn="ctr">
                       <a:solidFill>
-                        <a:srgbClr val="F2E5CF"/>
+                        <a:srgbClr val="F6EAD5"/>
                       </a:solidFill>
                       <a:prstDash val="solid"/>
                     </a:lnB>
@@ -7389,7 +7670,7 @@
                       <a:r>
                         <a:rPr sz="1400" b="0">
                           <a:solidFill>
-                            <a:srgbClr val="2B2B2B"/>
+                            <a:srgbClr val="26231F"/>
                           </a:solidFill>
                         </a:rPr>
                         <a:t>□</a:t>
@@ -7399,25 +7680,25 @@
                   <a:tcPr anchor="ctr" marL="73152" marR="73152">
                     <a:lnL w="9525" cap="flat" cmpd="sng" algn="ctr">
                       <a:solidFill>
-                        <a:srgbClr val="F2E5CF"/>
+                        <a:srgbClr val="F6EAD5"/>
                       </a:solidFill>
                       <a:prstDash val="solid"/>
                     </a:lnL>
                     <a:lnR w="9525" cap="flat" cmpd="sng" algn="ctr">
                       <a:solidFill>
-                        <a:srgbClr val="F2E5CF"/>
+                        <a:srgbClr val="F6EAD5"/>
                       </a:solidFill>
                       <a:prstDash val="solid"/>
                     </a:lnR>
                     <a:lnT w="9525" cap="flat" cmpd="sng" algn="ctr">
                       <a:solidFill>
-                        <a:srgbClr val="F2E5CF"/>
+                        <a:srgbClr val="F6EAD5"/>
                       </a:solidFill>
                       <a:prstDash val="solid"/>
                     </a:lnT>
                     <a:lnB w="9525" cap="flat" cmpd="sng" algn="ctr">
                       <a:solidFill>
-                        <a:srgbClr val="F2E5CF"/>
+                        <a:srgbClr val="F6EAD5"/>
                       </a:solidFill>
                       <a:prstDash val="solid"/>
                     </a:lnB>
@@ -7435,7 +7716,7 @@
                       <a:r>
                         <a:rPr sz="1400" b="0">
                           <a:solidFill>
-                            <a:srgbClr val="2B2B2B"/>
+                            <a:srgbClr val="26231F"/>
                           </a:solidFill>
                         </a:rPr>
                         <a:t>□</a:t>
@@ -7445,25 +7726,25 @@
                   <a:tcPr anchor="ctr" marL="73152" marR="73152">
                     <a:lnL w="9525" cap="flat" cmpd="sng" algn="ctr">
                       <a:solidFill>
-                        <a:srgbClr val="F2E5CF"/>
+                        <a:srgbClr val="F6EAD5"/>
                       </a:solidFill>
                       <a:prstDash val="solid"/>
                     </a:lnL>
                     <a:lnR w="9525" cap="flat" cmpd="sng" algn="ctr">
                       <a:solidFill>
-                        <a:srgbClr val="F2E5CF"/>
+                        <a:srgbClr val="F6EAD5"/>
                       </a:solidFill>
                       <a:prstDash val="solid"/>
                     </a:lnR>
                     <a:lnT w="9525" cap="flat" cmpd="sng" algn="ctr">
                       <a:solidFill>
-                        <a:srgbClr val="F2E5CF"/>
+                        <a:srgbClr val="F6EAD5"/>
                       </a:solidFill>
                       <a:prstDash val="solid"/>
                     </a:lnT>
                     <a:lnB w="9525" cap="flat" cmpd="sng" algn="ctr">
                       <a:solidFill>
-                        <a:srgbClr val="F2E5CF"/>
+                        <a:srgbClr val="F6EAD5"/>
                       </a:solidFill>
                       <a:prstDash val="solid"/>
                     </a:lnB>
@@ -7483,7 +7764,7 @@
                       <a:r>
                         <a:rPr sz="1400" b="1">
                           <a:solidFill>
-                            <a:srgbClr val="7C5D27"/>
+                            <a:srgbClr val="493D27"/>
                           </a:solidFill>
                         </a:rPr>
                         <a:t>연금·노후자금</a:t>
@@ -7493,30 +7774,30 @@
                   <a:tcPr anchor="ctr" marL="73152" marR="73152">
                     <a:lnL w="9525" cap="flat" cmpd="sng" algn="ctr">
                       <a:solidFill>
-                        <a:srgbClr val="F2E5CF"/>
+                        <a:srgbClr val="F6EAD5"/>
                       </a:solidFill>
                       <a:prstDash val="solid"/>
                     </a:lnL>
                     <a:lnR w="9525" cap="flat" cmpd="sng" algn="ctr">
                       <a:solidFill>
-                        <a:srgbClr val="F2E5CF"/>
+                        <a:srgbClr val="F6EAD5"/>
                       </a:solidFill>
                       <a:prstDash val="solid"/>
                     </a:lnR>
                     <a:lnT w="9525" cap="flat" cmpd="sng" algn="ctr">
                       <a:solidFill>
-                        <a:srgbClr val="F2E5CF"/>
+                        <a:srgbClr val="F6EAD5"/>
                       </a:solidFill>
                       <a:prstDash val="solid"/>
                     </a:lnT>
                     <a:lnB w="9525" cap="flat" cmpd="sng" algn="ctr">
                       <a:solidFill>
-                        <a:srgbClr val="F2E5CF"/>
+                        <a:srgbClr val="F6EAD5"/>
                       </a:solidFill>
                       <a:prstDash val="solid"/>
                     </a:lnB>
                     <a:solidFill>
-                      <a:srgbClr val="F2E5CF"/>
+                      <a:srgbClr val="F6EAD5"/>
                     </a:solidFill>
                   </a:tcPr>
                 </a:tc>
@@ -7529,7 +7810,7 @@
                       <a:r>
                         <a:rPr sz="1400" b="0">
                           <a:solidFill>
-                            <a:srgbClr val="2B2B2B"/>
+                            <a:srgbClr val="26231F"/>
                           </a:solidFill>
                         </a:rPr>
                         <a:t>□</a:t>
@@ -7539,30 +7820,30 @@
                   <a:tcPr anchor="ctr" marL="73152" marR="73152">
                     <a:lnL w="9525" cap="flat" cmpd="sng" algn="ctr">
                       <a:solidFill>
-                        <a:srgbClr val="F2E5CF"/>
+                        <a:srgbClr val="F6EAD5"/>
                       </a:solidFill>
                       <a:prstDash val="solid"/>
                     </a:lnL>
                     <a:lnR w="9525" cap="flat" cmpd="sng" algn="ctr">
                       <a:solidFill>
-                        <a:srgbClr val="F2E5CF"/>
+                        <a:srgbClr val="F6EAD5"/>
                       </a:solidFill>
                       <a:prstDash val="solid"/>
                     </a:lnR>
                     <a:lnT w="9525" cap="flat" cmpd="sng" algn="ctr">
                       <a:solidFill>
-                        <a:srgbClr val="F2E5CF"/>
+                        <a:srgbClr val="F6EAD5"/>
                       </a:solidFill>
                       <a:prstDash val="solid"/>
                     </a:lnT>
                     <a:lnB w="9525" cap="flat" cmpd="sng" algn="ctr">
                       <a:solidFill>
-                        <a:srgbClr val="F2E5CF"/>
+                        <a:srgbClr val="F6EAD5"/>
                       </a:solidFill>
                       <a:prstDash val="solid"/>
                     </a:lnB>
                     <a:solidFill>
-                      <a:srgbClr val="FAF6EF"/>
+                      <a:srgbClr val="FBF6EC"/>
                     </a:solidFill>
                   </a:tcPr>
                 </a:tc>
@@ -7575,7 +7856,7 @@
                       <a:r>
                         <a:rPr sz="1400" b="0">
                           <a:solidFill>
-                            <a:srgbClr val="2B2B2B"/>
+                            <a:srgbClr val="26231F"/>
                           </a:solidFill>
                         </a:rPr>
                         <a:t>□</a:t>
@@ -7585,30 +7866,30 @@
                   <a:tcPr anchor="ctr" marL="73152" marR="73152">
                     <a:lnL w="9525" cap="flat" cmpd="sng" algn="ctr">
                       <a:solidFill>
-                        <a:srgbClr val="F2E5CF"/>
+                        <a:srgbClr val="F6EAD5"/>
                       </a:solidFill>
                       <a:prstDash val="solid"/>
                     </a:lnL>
                     <a:lnR w="9525" cap="flat" cmpd="sng" algn="ctr">
                       <a:solidFill>
-                        <a:srgbClr val="F2E5CF"/>
+                        <a:srgbClr val="F6EAD5"/>
                       </a:solidFill>
                       <a:prstDash val="solid"/>
                     </a:lnR>
                     <a:lnT w="9525" cap="flat" cmpd="sng" algn="ctr">
                       <a:solidFill>
-                        <a:srgbClr val="F2E5CF"/>
+                        <a:srgbClr val="F6EAD5"/>
                       </a:solidFill>
                       <a:prstDash val="solid"/>
                     </a:lnT>
                     <a:lnB w="9525" cap="flat" cmpd="sng" algn="ctr">
                       <a:solidFill>
-                        <a:srgbClr val="F2E5CF"/>
+                        <a:srgbClr val="F6EAD5"/>
                       </a:solidFill>
                       <a:prstDash val="solid"/>
                     </a:lnB>
                     <a:solidFill>
-                      <a:srgbClr val="FAF6EF"/>
+                      <a:srgbClr val="FBF6EC"/>
                     </a:solidFill>
                   </a:tcPr>
                 </a:tc>
@@ -7621,7 +7902,7 @@
                       <a:r>
                         <a:rPr sz="1400" b="0">
                           <a:solidFill>
-                            <a:srgbClr val="2B2B2B"/>
+                            <a:srgbClr val="26231F"/>
                           </a:solidFill>
                         </a:rPr>
                         <a:t>□</a:t>
@@ -7631,30 +7912,30 @@
                   <a:tcPr anchor="ctr" marL="73152" marR="73152">
                     <a:lnL w="9525" cap="flat" cmpd="sng" algn="ctr">
                       <a:solidFill>
-                        <a:srgbClr val="F2E5CF"/>
+                        <a:srgbClr val="F6EAD5"/>
                       </a:solidFill>
                       <a:prstDash val="solid"/>
                     </a:lnL>
                     <a:lnR w="9525" cap="flat" cmpd="sng" algn="ctr">
                       <a:solidFill>
-                        <a:srgbClr val="F2E5CF"/>
+                        <a:srgbClr val="F6EAD5"/>
                       </a:solidFill>
                       <a:prstDash val="solid"/>
                     </a:lnR>
                     <a:lnT w="9525" cap="flat" cmpd="sng" algn="ctr">
                       <a:solidFill>
-                        <a:srgbClr val="F2E5CF"/>
+                        <a:srgbClr val="F6EAD5"/>
                       </a:solidFill>
                       <a:prstDash val="solid"/>
                     </a:lnT>
                     <a:lnB w="9525" cap="flat" cmpd="sng" algn="ctr">
                       <a:solidFill>
-                        <a:srgbClr val="F2E5CF"/>
+                        <a:srgbClr val="F6EAD5"/>
                       </a:solidFill>
                       <a:prstDash val="solid"/>
                     </a:lnB>
                     <a:solidFill>
-                      <a:srgbClr val="FAF6EF"/>
+                      <a:srgbClr val="FBF6EC"/>
                     </a:solidFill>
                   </a:tcPr>
                 </a:tc>
@@ -7677,7 +7958,7 @@
     <p:bg>
       <p:bgPr>
         <a:solidFill>
-          <a:srgbClr val="FAF6EF"/>
+          <a:srgbClr val="FFFFFF"/>
         </a:solidFill>
         <a:effectLst/>
       </p:bgPr>
@@ -7697,14 +7978,14 @@
         </p:nvSpPr>
         <p:spPr>
           <a:xfrm>
-            <a:off x="0" y="0"/>
-            <a:ext cx="12191695" cy="274320"/>
+            <a:off x="0" y="6565392"/>
+            <a:ext cx="12191695" cy="292608"/>
           </a:xfrm>
           <a:prstGeom prst="rect">
             <a:avLst/>
           </a:prstGeom>
           <a:solidFill>
-            <a:srgbClr val="C49645"/>
+            <a:srgbClr val="EBD4AD"/>
           </a:solidFill>
           <a:ln>
             <a:noFill/>
@@ -7720,20 +8001,49 @@
       </p:sp>
       <p:sp>
         <p:nvSpPr>
-          <p:cNvPr id="4" name="장식"/>
+          <p:cNvPr id="4" name="포인트"/>
           <p:cNvSpPr/>
           <p:nvPr/>
         </p:nvSpPr>
         <p:spPr>
           <a:xfrm>
-            <a:off x="0" y="274320"/>
-            <a:ext cx="12191695" cy="54864"/>
+            <a:off x="5958687" y="246888"/>
+            <a:ext cx="274320" cy="109728"/>
+          </a:xfrm>
+          <a:prstGeom prst="wave">
+            <a:avLst/>
+          </a:prstGeom>
+          <a:solidFill>
+            <a:srgbClr val="E1C698"/>
+          </a:solidFill>
+          <a:ln>
+            <a:noFill/>
+          </a:ln>
+        </p:spPr>
+        <p:txBody>
+          <a:bodyPr rtlCol="0" anchor="ctr"/>
+          <a:lstStyle/>
+          <a:p>
+            <a:pPr algn="ctr"/>
+          </a:p>
+        </p:txBody>
+      </p:sp>
+      <p:sp>
+        <p:nvSpPr>
+          <p:cNvPr id="5" name="장식"/>
+          <p:cNvSpPr/>
+          <p:nvPr/>
+        </p:nvSpPr>
+        <p:spPr>
+          <a:xfrm>
+            <a:off x="5684367" y="1572768"/>
+            <a:ext cx="822960" cy="22860"/>
           </a:xfrm>
           <a:prstGeom prst="rect">
             <a:avLst/>
           </a:prstGeom>
           <a:solidFill>
-            <a:srgbClr val="3B8591"/>
+            <a:srgbClr val="E1C698"/>
           </a:solidFill>
           <a:ln>
             <a:noFill/>
@@ -7744,6 +8054,44 @@
           <a:lstStyle/>
           <a:p>
             <a:pPr algn="ctr"/>
+          </a:p>
+        </p:txBody>
+      </p:sp>
+      <p:sp>
+        <p:nvSpPr>
+          <p:cNvPr id="6" name="상단 라벨"/>
+          <p:cNvSpPr txBox="1"/>
+          <p:nvPr/>
+        </p:nvSpPr>
+        <p:spPr>
+          <a:xfrm>
+            <a:off x="640080" y="182880"/>
+            <a:ext cx="3657600" cy="274320"/>
+          </a:xfrm>
+          <a:prstGeom prst="rect">
+            <a:avLst/>
+          </a:prstGeom>
+          <a:noFill/>
+        </p:spPr>
+        <p:txBody>
+          <a:bodyPr wrap="square" lIns="54864" rIns="54864" tIns="27432" bIns="27432" anchor="ctr">
+            <a:noAutofit/>
+          </a:bodyPr>
+          <a:lstStyle/>
+          <a:p>
+            <a:pPr algn="l">
+              <a:lnSpc>
+                <a:spcPct val="115000"/>
+              </a:lnSpc>
+            </a:pPr>
+            <a:r>
+              <a:rPr sz="800" b="1" i="0" spc="250">
+                <a:solidFill>
+                  <a:srgbClr val="8E8780"/>
+                </a:solidFill>
+              </a:rPr>
+              <a:t>INSURANCE CHECK</a:t>
+            </a:r>
           </a:p>
         </p:txBody>
       </p:sp>
@@ -7759,8 +8107,8 @@
         </p:nvSpPr>
         <p:spPr>
           <a:xfrm>
-            <a:off x="640080" y="457200"/>
-            <a:ext cx="9722815" cy="868680"/>
+            <a:off x="1371600" y="640080"/>
+            <a:ext cx="9448495" cy="868680"/>
           </a:xfrm>
         </p:spPr>
         <p:txBody>
@@ -7769,7 +8117,7 @@
           </a:bodyPr>
           <a:lstStyle/>
           <a:p>
-            <a:pPr algn="l">
+            <a:pPr algn="ctr">
               <a:lnSpc>
                 <a:spcPct val="105000"/>
               </a:lnSpc>
@@ -7777,7 +8125,7 @@
             <a:r>
               <a:rPr sz="3000" b="1" i="0">
                 <a:solidFill>
-                  <a:srgbClr val="7C5D27"/>
+                  <a:srgbClr val="26231F"/>
                 </a:solidFill>
               </a:rPr>
               <a:t>월 보험료 한눈에</a:t>
@@ -7787,26 +8135,26 @@
       </p:sp>
       <p:sp>
         <p:nvSpPr>
-          <p:cNvPr id="5" name="카드 1"/>
+          <p:cNvPr id="7" name="카드 1"/>
           <p:cNvSpPr/>
           <p:nvPr/>
         </p:nvSpPr>
         <p:spPr>
           <a:xfrm>
-            <a:off x="640080" y="1600200"/>
+            <a:off x="640080" y="1783080"/>
             <a:ext cx="3484778" cy="2926080"/>
           </a:xfrm>
           <a:prstGeom prst="roundRect">
             <a:avLst>
-              <a:gd name="adj" fmla="val 8000"/>
+              <a:gd name="adj" fmla="val 7000"/>
             </a:avLst>
           </a:prstGeom>
           <a:solidFill>
-            <a:srgbClr val="FAF6EF"/>
+            <a:srgbClr val="FFFFFF"/>
           </a:solidFill>
-          <a:ln w="15875">
+          <a:ln w="12700">
             <a:solidFill>
-              <a:srgbClr val="F2E5CF"/>
+              <a:srgbClr val="EBD4AD"/>
             </a:solidFill>
           </a:ln>
         </p:spPr>
@@ -7820,56 +8168,51 @@
       </p:sp>
       <p:sp>
         <p:nvSpPr>
-          <p:cNvPr id="6" name="번호 1"/>
-          <p:cNvSpPr/>
+          <p:cNvPr id="8" name="번호 1"/>
+          <p:cNvSpPr txBox="1"/>
           <p:nvPr/>
         </p:nvSpPr>
         <p:spPr>
           <a:xfrm>
-            <a:off x="822959" y="1783080"/>
-            <a:ext cx="457200" cy="457200"/>
-          </a:xfrm>
-          <a:prstGeom prst="ellipse">
+            <a:off x="731519" y="1920240"/>
+            <a:ext cx="914400" cy="548640"/>
+          </a:xfrm>
+          <a:prstGeom prst="rect">
             <a:avLst/>
           </a:prstGeom>
-          <a:solidFill>
-            <a:srgbClr val="C49645"/>
-          </a:solidFill>
-          <a:ln>
-            <a:noFill/>
-          </a:ln>
-        </p:spPr>
-        <p:txBody>
-          <a:bodyPr rtlCol="0" anchor="ctr" wrap="square" lIns="54864" rIns="54864" tIns="27432" bIns="27432">
+          <a:noFill/>
+        </p:spPr>
+        <p:txBody>
+          <a:bodyPr wrap="square" lIns="54864" rIns="54864" tIns="27432" bIns="27432" anchor="ctr">
             <a:noAutofit/>
           </a:bodyPr>
           <a:lstStyle/>
           <a:p>
-            <a:pPr algn="ctr">
+            <a:pPr algn="l">
               <a:lnSpc>
-                <a:spcPct val="100000"/>
+                <a:spcPct val="115000"/>
               </a:lnSpc>
             </a:pPr>
             <a:r>
-              <a:rPr sz="1600" b="1" i="0">
+              <a:rPr sz="2400" b="1" i="0">
                 <a:solidFill>
-                  <a:srgbClr val="FFFFFF"/>
+                  <a:srgbClr val="E1C698"/>
                 </a:solidFill>
               </a:rPr>
-              <a:t>1</a:t>
+              <a:t>01</a:t>
             </a:r>
           </a:p>
         </p:txBody>
       </p:sp>
       <p:sp>
         <p:nvSpPr>
-          <p:cNvPr id="7" name="TextBox 6"/>
+          <p:cNvPr id="9" name="TextBox 8"/>
           <p:cNvSpPr txBox="1"/>
           <p:nvPr/>
         </p:nvSpPr>
         <p:spPr>
           <a:xfrm>
-            <a:off x="777240" y="2377440"/>
+            <a:off x="777240" y="2560320"/>
             <a:ext cx="3210458" cy="640080"/>
           </a:xfrm>
           <a:prstGeom prst="rect">
@@ -7891,7 +8234,7 @@
             <a:r>
               <a:rPr sz="1700" b="1" i="0">
                 <a:solidFill>
-                  <a:srgbClr val="7C5D27"/>
+                  <a:srgbClr val="493D27"/>
                 </a:solidFill>
               </a:rPr>
               <a:t>월 보험료 합계</a:t>
@@ -7901,13 +8244,13 @@
       </p:sp>
       <p:sp>
         <p:nvSpPr>
-          <p:cNvPr id="8" name="TextBox 7"/>
+          <p:cNvPr id="10" name="TextBox 9"/>
           <p:cNvSpPr txBox="1"/>
           <p:nvPr/>
         </p:nvSpPr>
         <p:spPr>
           <a:xfrm>
-            <a:off x="777240" y="3063240"/>
+            <a:off x="777240" y="3246120"/>
             <a:ext cx="3210458" cy="1325880"/>
           </a:xfrm>
           <a:prstGeom prst="rect">
@@ -7929,7 +8272,7 @@
             <a:r>
               <a:rPr sz="3000" b="0" i="0">
                 <a:solidFill>
-                  <a:srgbClr val="2B2B2B"/>
+                  <a:srgbClr val="26231F"/>
                 </a:solidFill>
               </a:rPr>
               <a:t>0원</a:t>
@@ -7939,26 +8282,26 @@
       </p:sp>
       <p:sp>
         <p:nvSpPr>
-          <p:cNvPr id="9" name="카드 2"/>
+          <p:cNvPr id="11" name="카드 2"/>
           <p:cNvSpPr/>
           <p:nvPr/>
         </p:nvSpPr>
         <p:spPr>
           <a:xfrm>
-            <a:off x="4353458" y="1600200"/>
+            <a:off x="4353458" y="1783080"/>
             <a:ext cx="3484778" cy="2926080"/>
           </a:xfrm>
           <a:prstGeom prst="roundRect">
             <a:avLst>
-              <a:gd name="adj" fmla="val 8000"/>
+              <a:gd name="adj" fmla="val 7000"/>
             </a:avLst>
           </a:prstGeom>
           <a:solidFill>
-            <a:srgbClr val="FAF6EF"/>
+            <a:srgbClr val="FFFFFF"/>
           </a:solidFill>
-          <a:ln w="15875">
+          <a:ln w="12700">
             <a:solidFill>
-              <a:srgbClr val="F2E5CF"/>
+              <a:srgbClr val="EBD4AD"/>
             </a:solidFill>
           </a:ln>
         </p:spPr>
@@ -7972,56 +8315,51 @@
       </p:sp>
       <p:sp>
         <p:nvSpPr>
-          <p:cNvPr id="10" name="번호 2"/>
-          <p:cNvSpPr/>
+          <p:cNvPr id="12" name="번호 2"/>
+          <p:cNvSpPr txBox="1"/>
           <p:nvPr/>
         </p:nvSpPr>
         <p:spPr>
           <a:xfrm>
-            <a:off x="4536338" y="1783080"/>
-            <a:ext cx="457200" cy="457200"/>
-          </a:xfrm>
-          <a:prstGeom prst="ellipse">
+            <a:off x="4444898" y="1920240"/>
+            <a:ext cx="914400" cy="548640"/>
+          </a:xfrm>
+          <a:prstGeom prst="rect">
             <a:avLst/>
           </a:prstGeom>
-          <a:solidFill>
-            <a:srgbClr val="C49645"/>
-          </a:solidFill>
-          <a:ln>
-            <a:noFill/>
-          </a:ln>
-        </p:spPr>
-        <p:txBody>
-          <a:bodyPr rtlCol="0" anchor="ctr" wrap="square" lIns="54864" rIns="54864" tIns="27432" bIns="27432">
+          <a:noFill/>
+        </p:spPr>
+        <p:txBody>
+          <a:bodyPr wrap="square" lIns="54864" rIns="54864" tIns="27432" bIns="27432" anchor="ctr">
             <a:noAutofit/>
           </a:bodyPr>
           <a:lstStyle/>
           <a:p>
-            <a:pPr algn="ctr">
+            <a:pPr algn="l">
               <a:lnSpc>
-                <a:spcPct val="100000"/>
+                <a:spcPct val="115000"/>
               </a:lnSpc>
             </a:pPr>
             <a:r>
-              <a:rPr sz="1600" b="1" i="0">
+              <a:rPr sz="2400" b="1" i="0">
                 <a:solidFill>
-                  <a:srgbClr val="FFFFFF"/>
+                  <a:srgbClr val="E1C698"/>
                 </a:solidFill>
               </a:rPr>
-              <a:t>2</a:t>
+              <a:t>02</a:t>
             </a:r>
           </a:p>
         </p:txBody>
       </p:sp>
       <p:sp>
         <p:nvSpPr>
-          <p:cNvPr id="11" name="TextBox 10"/>
+          <p:cNvPr id="13" name="TextBox 12"/>
           <p:cNvSpPr txBox="1"/>
           <p:nvPr/>
         </p:nvSpPr>
         <p:spPr>
           <a:xfrm>
-            <a:off x="4490618" y="2377440"/>
+            <a:off x="4490618" y="2560320"/>
             <a:ext cx="3210458" cy="640080"/>
           </a:xfrm>
           <a:prstGeom prst="rect">
@@ -8043,7 +8381,7 @@
             <a:r>
               <a:rPr sz="1700" b="1" i="0">
                 <a:solidFill>
-                  <a:srgbClr val="7C5D27"/>
+                  <a:srgbClr val="493D27"/>
                 </a:solidFill>
               </a:rPr>
               <a:t>연 보험료 합계</a:t>
@@ -8053,13 +8391,13 @@
       </p:sp>
       <p:sp>
         <p:nvSpPr>
-          <p:cNvPr id="12" name="TextBox 11"/>
+          <p:cNvPr id="14" name="TextBox 13"/>
           <p:cNvSpPr txBox="1"/>
           <p:nvPr/>
         </p:nvSpPr>
         <p:spPr>
           <a:xfrm>
-            <a:off x="4490618" y="3063240"/>
+            <a:off x="4490618" y="3246120"/>
             <a:ext cx="3210458" cy="1325880"/>
           </a:xfrm>
           <a:prstGeom prst="rect">
@@ -8081,7 +8419,7 @@
             <a:r>
               <a:rPr sz="3000" b="0" i="0">
                 <a:solidFill>
-                  <a:srgbClr val="2B2B2B"/>
+                  <a:srgbClr val="26231F"/>
                 </a:solidFill>
               </a:rPr>
               <a:t>0원</a:t>
@@ -8091,26 +8429,26 @@
       </p:sp>
       <p:sp>
         <p:nvSpPr>
-          <p:cNvPr id="13" name="카드 3"/>
+          <p:cNvPr id="15" name="카드 3"/>
           <p:cNvSpPr/>
           <p:nvPr/>
         </p:nvSpPr>
         <p:spPr>
           <a:xfrm>
-            <a:off x="8066836" y="1600200"/>
+            <a:off x="8066836" y="1783080"/>
             <a:ext cx="3484778" cy="2926080"/>
           </a:xfrm>
           <a:prstGeom prst="roundRect">
             <a:avLst>
-              <a:gd name="adj" fmla="val 8000"/>
+              <a:gd name="adj" fmla="val 7000"/>
             </a:avLst>
           </a:prstGeom>
           <a:solidFill>
-            <a:srgbClr val="FAF6EF"/>
+            <a:srgbClr val="FFFFFF"/>
           </a:solidFill>
-          <a:ln w="15875">
+          <a:ln w="12700">
             <a:solidFill>
-              <a:srgbClr val="F2E5CF"/>
+              <a:srgbClr val="EBD4AD"/>
             </a:solidFill>
           </a:ln>
         </p:spPr>
@@ -8124,56 +8462,51 @@
       </p:sp>
       <p:sp>
         <p:nvSpPr>
-          <p:cNvPr id="14" name="번호 3"/>
-          <p:cNvSpPr/>
+          <p:cNvPr id="16" name="번호 3"/>
+          <p:cNvSpPr txBox="1"/>
           <p:nvPr/>
         </p:nvSpPr>
         <p:spPr>
           <a:xfrm>
-            <a:off x="8249716" y="1783080"/>
-            <a:ext cx="457200" cy="457200"/>
-          </a:xfrm>
-          <a:prstGeom prst="ellipse">
+            <a:off x="8158276" y="1920240"/>
+            <a:ext cx="914400" cy="548640"/>
+          </a:xfrm>
+          <a:prstGeom prst="rect">
             <a:avLst/>
           </a:prstGeom>
-          <a:solidFill>
-            <a:srgbClr val="C49645"/>
-          </a:solidFill>
-          <a:ln>
-            <a:noFill/>
-          </a:ln>
-        </p:spPr>
-        <p:txBody>
-          <a:bodyPr rtlCol="0" anchor="ctr" wrap="square" lIns="54864" rIns="54864" tIns="27432" bIns="27432">
+          <a:noFill/>
+        </p:spPr>
+        <p:txBody>
+          <a:bodyPr wrap="square" lIns="54864" rIns="54864" tIns="27432" bIns="27432" anchor="ctr">
             <a:noAutofit/>
           </a:bodyPr>
           <a:lstStyle/>
           <a:p>
-            <a:pPr algn="ctr">
+            <a:pPr algn="l">
               <a:lnSpc>
-                <a:spcPct val="100000"/>
+                <a:spcPct val="115000"/>
               </a:lnSpc>
             </a:pPr>
             <a:r>
-              <a:rPr sz="1600" b="1" i="0">
+              <a:rPr sz="2400" b="1" i="0">
                 <a:solidFill>
-                  <a:srgbClr val="FFFFFF"/>
+                  <a:srgbClr val="E1C698"/>
                 </a:solidFill>
               </a:rPr>
-              <a:t>3</a:t>
+              <a:t>03</a:t>
             </a:r>
           </a:p>
         </p:txBody>
       </p:sp>
       <p:sp>
         <p:nvSpPr>
-          <p:cNvPr id="15" name="TextBox 14"/>
+          <p:cNvPr id="17" name="TextBox 16"/>
           <p:cNvSpPr txBox="1"/>
           <p:nvPr/>
         </p:nvSpPr>
         <p:spPr>
           <a:xfrm>
-            <a:off x="8203996" y="2377440"/>
+            <a:off x="8203996" y="2560320"/>
             <a:ext cx="3210458" cy="640080"/>
           </a:xfrm>
           <a:prstGeom prst="rect">
@@ -8195,7 +8528,7 @@
             <a:r>
               <a:rPr sz="1700" b="1" i="0">
                 <a:solidFill>
-                  <a:srgbClr val="7C5D27"/>
+                  <a:srgbClr val="493D27"/>
                 </a:solidFill>
               </a:rPr>
               <a:t>월 소득 대비</a:t>
@@ -8205,13 +8538,13 @@
       </p:sp>
       <p:sp>
         <p:nvSpPr>
-          <p:cNvPr id="16" name="TextBox 15"/>
+          <p:cNvPr id="18" name="TextBox 17"/>
           <p:cNvSpPr txBox="1"/>
           <p:nvPr/>
         </p:nvSpPr>
         <p:spPr>
           <a:xfrm>
-            <a:off x="8203996" y="3063240"/>
+            <a:off x="8203996" y="3246120"/>
             <a:ext cx="3210458" cy="1325880"/>
           </a:xfrm>
           <a:prstGeom prst="rect">
@@ -8233,7 +8566,7 @@
             <a:r>
               <a:rPr sz="3000" b="0" i="0">
                 <a:solidFill>
-                  <a:srgbClr val="2B2B2B"/>
+                  <a:srgbClr val="26231F"/>
                 </a:solidFill>
               </a:rPr>
               <a:t>0 %</a:t>
@@ -8243,13 +8576,13 @@
       </p:sp>
       <p:sp>
         <p:nvSpPr>
-          <p:cNvPr id="17" name="안내"/>
+          <p:cNvPr id="19" name="안내"/>
           <p:cNvSpPr txBox="1"/>
           <p:nvPr/>
         </p:nvSpPr>
         <p:spPr>
           <a:xfrm>
-            <a:off x="640080" y="4709160"/>
+            <a:off x="640080" y="4892040"/>
             <a:ext cx="10911535" cy="365760"/>
           </a:xfrm>
           <a:prstGeom prst="rect">
@@ -8293,7 +8626,7 @@
     <p:bg>
       <p:bgPr>
         <a:solidFill>
-          <a:srgbClr val="FAF6EF"/>
+          <a:srgbClr val="FFFFFF"/>
         </a:solidFill>
         <a:effectLst/>
       </p:bgPr>
@@ -8313,14 +8646,14 @@
         </p:nvSpPr>
         <p:spPr>
           <a:xfrm>
-            <a:off x="0" y="0"/>
-            <a:ext cx="12191695" cy="274320"/>
+            <a:off x="0" y="6565392"/>
+            <a:ext cx="12191695" cy="292608"/>
           </a:xfrm>
           <a:prstGeom prst="rect">
             <a:avLst/>
           </a:prstGeom>
           <a:solidFill>
-            <a:srgbClr val="C49645"/>
+            <a:srgbClr val="EBD4AD"/>
           </a:solidFill>
           <a:ln>
             <a:noFill/>
@@ -8336,20 +8669,49 @@
       </p:sp>
       <p:sp>
         <p:nvSpPr>
-          <p:cNvPr id="4" name="장식"/>
+          <p:cNvPr id="4" name="포인트"/>
           <p:cNvSpPr/>
           <p:nvPr/>
         </p:nvSpPr>
         <p:spPr>
           <a:xfrm>
-            <a:off x="0" y="274320"/>
-            <a:ext cx="12191695" cy="54864"/>
+            <a:off x="5958687" y="246888"/>
+            <a:ext cx="274320" cy="109728"/>
+          </a:xfrm>
+          <a:prstGeom prst="wave">
+            <a:avLst/>
+          </a:prstGeom>
+          <a:solidFill>
+            <a:srgbClr val="E1C698"/>
+          </a:solidFill>
+          <a:ln>
+            <a:noFill/>
+          </a:ln>
+        </p:spPr>
+        <p:txBody>
+          <a:bodyPr rtlCol="0" anchor="ctr"/>
+          <a:lstStyle/>
+          <a:p>
+            <a:pPr algn="ctr"/>
+          </a:p>
+        </p:txBody>
+      </p:sp>
+      <p:sp>
+        <p:nvSpPr>
+          <p:cNvPr id="5" name="장식"/>
+          <p:cNvSpPr/>
+          <p:nvPr/>
+        </p:nvSpPr>
+        <p:spPr>
+          <a:xfrm>
+            <a:off x="5684367" y="1572768"/>
+            <a:ext cx="822960" cy="22860"/>
           </a:xfrm>
           <a:prstGeom prst="rect">
             <a:avLst/>
           </a:prstGeom>
           <a:solidFill>
-            <a:srgbClr val="3B8591"/>
+            <a:srgbClr val="E1C698"/>
           </a:solidFill>
           <a:ln>
             <a:noFill/>
@@ -8360,6 +8722,44 @@
           <a:lstStyle/>
           <a:p>
             <a:pPr algn="ctr"/>
+          </a:p>
+        </p:txBody>
+      </p:sp>
+      <p:sp>
+        <p:nvSpPr>
+          <p:cNvPr id="6" name="상단 라벨"/>
+          <p:cNvSpPr txBox="1"/>
+          <p:nvPr/>
+        </p:nvSpPr>
+        <p:spPr>
+          <a:xfrm>
+            <a:off x="640080" y="182880"/>
+            <a:ext cx="3657600" cy="274320"/>
+          </a:xfrm>
+          <a:prstGeom prst="rect">
+            <a:avLst/>
+          </a:prstGeom>
+          <a:noFill/>
+        </p:spPr>
+        <p:txBody>
+          <a:bodyPr wrap="square" lIns="54864" rIns="54864" tIns="27432" bIns="27432" anchor="ctr">
+            <a:noAutofit/>
+          </a:bodyPr>
+          <a:lstStyle/>
+          <a:p>
+            <a:pPr algn="l">
+              <a:lnSpc>
+                <a:spcPct val="115000"/>
+              </a:lnSpc>
+            </a:pPr>
+            <a:r>
+              <a:rPr sz="800" b="1" i="0" spc="250">
+                <a:solidFill>
+                  <a:srgbClr val="8E8780"/>
+                </a:solidFill>
+              </a:rPr>
+              <a:t>INSURANCE CHECK</a:t>
+            </a:r>
           </a:p>
         </p:txBody>
       </p:sp>
@@ -8375,8 +8775,8 @@
         </p:nvSpPr>
         <p:spPr>
           <a:xfrm>
-            <a:off x="640080" y="457200"/>
-            <a:ext cx="9722815" cy="868680"/>
+            <a:off x="1371600" y="640080"/>
+            <a:ext cx="9448495" cy="868680"/>
           </a:xfrm>
         </p:spPr>
         <p:txBody>
@@ -8385,7 +8785,7 @@
           </a:bodyPr>
           <a:lstStyle/>
           <a:p>
-            <a:pPr algn="l">
+            <a:pPr algn="ctr">
               <a:lnSpc>
                 <a:spcPct val="105000"/>
               </a:lnSpc>
@@ -8393,7 +8793,7 @@
             <a:r>
               <a:rPr sz="3000" b="1" i="0">
                 <a:solidFill>
-                  <a:srgbClr val="7C5D27"/>
+                  <a:srgbClr val="26231F"/>
                 </a:solidFill>
               </a:rPr>
               <a:t>점검 메모와 다음 할 일</a:t>
@@ -8403,26 +8803,26 @@
       </p:sp>
       <p:sp>
         <p:nvSpPr>
-          <p:cNvPr id="5" name="카드 1"/>
+          <p:cNvPr id="7" name="카드 1"/>
           <p:cNvSpPr/>
           <p:nvPr/>
         </p:nvSpPr>
         <p:spPr>
           <a:xfrm>
-            <a:off x="640080" y="1600200"/>
-            <a:ext cx="3484778" cy="4160520"/>
+            <a:off x="640080" y="1783080"/>
+            <a:ext cx="3484778" cy="3749039"/>
           </a:xfrm>
           <a:prstGeom prst="roundRect">
             <a:avLst>
-              <a:gd name="adj" fmla="val 8000"/>
+              <a:gd name="adj" fmla="val 7000"/>
             </a:avLst>
           </a:prstGeom>
           <a:solidFill>
-            <a:srgbClr val="FAF6EF"/>
+            <a:srgbClr val="FFFFFF"/>
           </a:solidFill>
-          <a:ln w="15875">
+          <a:ln w="12700">
             <a:solidFill>
-              <a:srgbClr val="F2E5CF"/>
+              <a:srgbClr val="EBD4AD"/>
             </a:solidFill>
           </a:ln>
         </p:spPr>
@@ -8436,56 +8836,51 @@
       </p:sp>
       <p:sp>
         <p:nvSpPr>
-          <p:cNvPr id="6" name="번호 1"/>
-          <p:cNvSpPr/>
+          <p:cNvPr id="8" name="번호 1"/>
+          <p:cNvSpPr txBox="1"/>
           <p:nvPr/>
         </p:nvSpPr>
         <p:spPr>
           <a:xfrm>
-            <a:off x="822959" y="1783080"/>
-            <a:ext cx="457200" cy="457200"/>
-          </a:xfrm>
-          <a:prstGeom prst="ellipse">
+            <a:off x="731519" y="1920240"/>
+            <a:ext cx="914400" cy="548640"/>
+          </a:xfrm>
+          <a:prstGeom prst="rect">
             <a:avLst/>
           </a:prstGeom>
-          <a:solidFill>
-            <a:srgbClr val="C49645"/>
-          </a:solidFill>
-          <a:ln>
-            <a:noFill/>
-          </a:ln>
-        </p:spPr>
-        <p:txBody>
-          <a:bodyPr rtlCol="0" anchor="ctr" wrap="square" lIns="54864" rIns="54864" tIns="27432" bIns="27432">
+          <a:noFill/>
+        </p:spPr>
+        <p:txBody>
+          <a:bodyPr wrap="square" lIns="54864" rIns="54864" tIns="27432" bIns="27432" anchor="ctr">
             <a:noAutofit/>
           </a:bodyPr>
           <a:lstStyle/>
           <a:p>
-            <a:pPr algn="ctr">
+            <a:pPr algn="l">
               <a:lnSpc>
-                <a:spcPct val="100000"/>
+                <a:spcPct val="115000"/>
               </a:lnSpc>
             </a:pPr>
             <a:r>
-              <a:rPr sz="1600" b="1" i="0">
+              <a:rPr sz="2400" b="1" i="0">
                 <a:solidFill>
-                  <a:srgbClr val="FFFFFF"/>
+                  <a:srgbClr val="E1C698"/>
                 </a:solidFill>
               </a:rPr>
-              <a:t>1</a:t>
+              <a:t>01</a:t>
             </a:r>
           </a:p>
         </p:txBody>
       </p:sp>
       <p:sp>
         <p:nvSpPr>
-          <p:cNvPr id="7" name="TextBox 6"/>
+          <p:cNvPr id="9" name="TextBox 8"/>
           <p:cNvSpPr txBox="1"/>
           <p:nvPr/>
         </p:nvSpPr>
         <p:spPr>
           <a:xfrm>
-            <a:off x="777240" y="2377440"/>
+            <a:off x="777240" y="2560320"/>
             <a:ext cx="3210458" cy="640080"/>
           </a:xfrm>
           <a:prstGeom prst="rect">
@@ -8507,7 +8902,7 @@
             <a:r>
               <a:rPr sz="1800" b="1" i="0">
                 <a:solidFill>
-                  <a:srgbClr val="7C5D27"/>
+                  <a:srgbClr val="493D27"/>
                 </a:solidFill>
               </a:rPr>
               <a:t>확인할 것</a:t>
@@ -8517,14 +8912,14 @@
       </p:sp>
       <p:sp>
         <p:nvSpPr>
-          <p:cNvPr id="8" name="TextBox 7"/>
+          <p:cNvPr id="10" name="TextBox 9"/>
           <p:cNvSpPr txBox="1"/>
           <p:nvPr/>
         </p:nvSpPr>
         <p:spPr>
           <a:xfrm>
-            <a:off x="777240" y="3063240"/>
-            <a:ext cx="3210458" cy="2560320"/>
+            <a:off x="777240" y="3246120"/>
+            <a:ext cx="3210458" cy="2148839"/>
           </a:xfrm>
           <a:prstGeom prst="rect">
             <a:avLst/>
@@ -8545,7 +8940,7 @@
             <a:r>
               <a:rPr sz="1500" b="0" i="0">
                 <a:solidFill>
-                  <a:srgbClr val="2B2B2B"/>
+                  <a:srgbClr val="26231F"/>
                 </a:solidFill>
               </a:rPr>
               <a:t>내용을 입력하세요</a:t>
@@ -8555,26 +8950,26 @@
       </p:sp>
       <p:sp>
         <p:nvSpPr>
-          <p:cNvPr id="9" name="카드 2"/>
+          <p:cNvPr id="11" name="카드 2"/>
           <p:cNvSpPr/>
           <p:nvPr/>
         </p:nvSpPr>
         <p:spPr>
           <a:xfrm>
-            <a:off x="4353458" y="1600200"/>
-            <a:ext cx="3484778" cy="4160520"/>
+            <a:off x="4353458" y="1783080"/>
+            <a:ext cx="3484778" cy="3749039"/>
           </a:xfrm>
           <a:prstGeom prst="roundRect">
             <a:avLst>
-              <a:gd name="adj" fmla="val 8000"/>
+              <a:gd name="adj" fmla="val 7000"/>
             </a:avLst>
           </a:prstGeom>
           <a:solidFill>
-            <a:srgbClr val="FAF6EF"/>
+            <a:srgbClr val="FFFFFF"/>
           </a:solidFill>
-          <a:ln w="15875">
+          <a:ln w="12700">
             <a:solidFill>
-              <a:srgbClr val="F2E5CF"/>
+              <a:srgbClr val="EBD4AD"/>
             </a:solidFill>
           </a:ln>
         </p:spPr>
@@ -8588,56 +8983,51 @@
       </p:sp>
       <p:sp>
         <p:nvSpPr>
-          <p:cNvPr id="10" name="번호 2"/>
-          <p:cNvSpPr/>
+          <p:cNvPr id="12" name="번호 2"/>
+          <p:cNvSpPr txBox="1"/>
           <p:nvPr/>
         </p:nvSpPr>
         <p:spPr>
           <a:xfrm>
-            <a:off x="4536338" y="1783080"/>
-            <a:ext cx="457200" cy="457200"/>
-          </a:xfrm>
-          <a:prstGeom prst="ellipse">
+            <a:off x="4444898" y="1920240"/>
+            <a:ext cx="914400" cy="548640"/>
+          </a:xfrm>
+          <a:prstGeom prst="rect">
             <a:avLst/>
           </a:prstGeom>
-          <a:solidFill>
-            <a:srgbClr val="C49645"/>
-          </a:solidFill>
-          <a:ln>
-            <a:noFill/>
-          </a:ln>
-        </p:spPr>
-        <p:txBody>
-          <a:bodyPr rtlCol="0" anchor="ctr" wrap="square" lIns="54864" rIns="54864" tIns="27432" bIns="27432">
+          <a:noFill/>
+        </p:spPr>
+        <p:txBody>
+          <a:bodyPr wrap="square" lIns="54864" rIns="54864" tIns="27432" bIns="27432" anchor="ctr">
             <a:noAutofit/>
           </a:bodyPr>
           <a:lstStyle/>
           <a:p>
-            <a:pPr algn="ctr">
+            <a:pPr algn="l">
               <a:lnSpc>
-                <a:spcPct val="100000"/>
+                <a:spcPct val="115000"/>
               </a:lnSpc>
             </a:pPr>
             <a:r>
-              <a:rPr sz="1600" b="1" i="0">
+              <a:rPr sz="2400" b="1" i="0">
                 <a:solidFill>
-                  <a:srgbClr val="FFFFFF"/>
+                  <a:srgbClr val="E1C698"/>
                 </a:solidFill>
               </a:rPr>
-              <a:t>2</a:t>
+              <a:t>02</a:t>
             </a:r>
           </a:p>
         </p:txBody>
       </p:sp>
       <p:sp>
         <p:nvSpPr>
-          <p:cNvPr id="11" name="TextBox 10"/>
+          <p:cNvPr id="13" name="TextBox 12"/>
           <p:cNvSpPr txBox="1"/>
           <p:nvPr/>
         </p:nvSpPr>
         <p:spPr>
           <a:xfrm>
-            <a:off x="4490618" y="2377440"/>
+            <a:off x="4490618" y="2560320"/>
             <a:ext cx="3210458" cy="640080"/>
           </a:xfrm>
           <a:prstGeom prst="rect">
@@ -8659,7 +9049,7 @@
             <a:r>
               <a:rPr sz="1800" b="1" i="0">
                 <a:solidFill>
-                  <a:srgbClr val="7C5D27"/>
+                  <a:srgbClr val="493D27"/>
                 </a:solidFill>
               </a:rPr>
               <a:t>문의할 것</a:t>
@@ -8669,14 +9059,14 @@
       </p:sp>
       <p:sp>
         <p:nvSpPr>
-          <p:cNvPr id="12" name="TextBox 11"/>
+          <p:cNvPr id="14" name="TextBox 13"/>
           <p:cNvSpPr txBox="1"/>
           <p:nvPr/>
         </p:nvSpPr>
         <p:spPr>
           <a:xfrm>
-            <a:off x="4490618" y="3063240"/>
-            <a:ext cx="3210458" cy="2560320"/>
+            <a:off x="4490618" y="3246120"/>
+            <a:ext cx="3210458" cy="2148839"/>
           </a:xfrm>
           <a:prstGeom prst="rect">
             <a:avLst/>
@@ -8697,7 +9087,7 @@
             <a:r>
               <a:rPr sz="1500" b="0" i="0">
                 <a:solidFill>
-                  <a:srgbClr val="2B2B2B"/>
+                  <a:srgbClr val="26231F"/>
                 </a:solidFill>
               </a:rPr>
               <a:t>내용을 입력하세요</a:t>
@@ -8707,26 +9097,26 @@
       </p:sp>
       <p:sp>
         <p:nvSpPr>
-          <p:cNvPr id="13" name="카드 3"/>
+          <p:cNvPr id="15" name="카드 3"/>
           <p:cNvSpPr/>
           <p:nvPr/>
         </p:nvSpPr>
         <p:spPr>
           <a:xfrm>
-            <a:off x="8066836" y="1600200"/>
-            <a:ext cx="3484778" cy="4160520"/>
+            <a:off x="8066836" y="1783080"/>
+            <a:ext cx="3484778" cy="3749039"/>
           </a:xfrm>
           <a:prstGeom prst="roundRect">
             <a:avLst>
-              <a:gd name="adj" fmla="val 8000"/>
+              <a:gd name="adj" fmla="val 7000"/>
             </a:avLst>
           </a:prstGeom>
           <a:solidFill>
-            <a:srgbClr val="FAF6EF"/>
+            <a:srgbClr val="FFFFFF"/>
           </a:solidFill>
-          <a:ln w="15875">
+          <a:ln w="12700">
             <a:solidFill>
-              <a:srgbClr val="F2E5CF"/>
+              <a:srgbClr val="EBD4AD"/>
             </a:solidFill>
           </a:ln>
         </p:spPr>
@@ -8740,56 +9130,51 @@
       </p:sp>
       <p:sp>
         <p:nvSpPr>
-          <p:cNvPr id="14" name="번호 3"/>
-          <p:cNvSpPr/>
+          <p:cNvPr id="16" name="번호 3"/>
+          <p:cNvSpPr txBox="1"/>
           <p:nvPr/>
         </p:nvSpPr>
         <p:spPr>
           <a:xfrm>
-            <a:off x="8249716" y="1783080"/>
-            <a:ext cx="457200" cy="457200"/>
-          </a:xfrm>
-          <a:prstGeom prst="ellipse">
+            <a:off x="8158276" y="1920240"/>
+            <a:ext cx="914400" cy="548640"/>
+          </a:xfrm>
+          <a:prstGeom prst="rect">
             <a:avLst/>
           </a:prstGeom>
-          <a:solidFill>
-            <a:srgbClr val="C49645"/>
-          </a:solidFill>
-          <a:ln>
-            <a:noFill/>
-          </a:ln>
-        </p:spPr>
-        <p:txBody>
-          <a:bodyPr rtlCol="0" anchor="ctr" wrap="square" lIns="54864" rIns="54864" tIns="27432" bIns="27432">
+          <a:noFill/>
+        </p:spPr>
+        <p:txBody>
+          <a:bodyPr wrap="square" lIns="54864" rIns="54864" tIns="27432" bIns="27432" anchor="ctr">
             <a:noAutofit/>
           </a:bodyPr>
           <a:lstStyle/>
           <a:p>
-            <a:pPr algn="ctr">
+            <a:pPr algn="l">
               <a:lnSpc>
-                <a:spcPct val="100000"/>
+                <a:spcPct val="115000"/>
               </a:lnSpc>
             </a:pPr>
             <a:r>
-              <a:rPr sz="1600" b="1" i="0">
+              <a:rPr sz="2400" b="1" i="0">
                 <a:solidFill>
-                  <a:srgbClr val="FFFFFF"/>
+                  <a:srgbClr val="E1C698"/>
                 </a:solidFill>
               </a:rPr>
-              <a:t>3</a:t>
+              <a:t>03</a:t>
             </a:r>
           </a:p>
         </p:txBody>
       </p:sp>
       <p:sp>
         <p:nvSpPr>
-          <p:cNvPr id="15" name="TextBox 14"/>
+          <p:cNvPr id="17" name="TextBox 16"/>
           <p:cNvSpPr txBox="1"/>
           <p:nvPr/>
         </p:nvSpPr>
         <p:spPr>
           <a:xfrm>
-            <a:off x="8203996" y="2377440"/>
+            <a:off x="8203996" y="2560320"/>
             <a:ext cx="3210458" cy="640080"/>
           </a:xfrm>
           <a:prstGeom prst="rect">
@@ -8811,7 +9196,7 @@
             <a:r>
               <a:rPr sz="1800" b="1" i="0">
                 <a:solidFill>
-                  <a:srgbClr val="7C5D27"/>
+                  <a:srgbClr val="493D27"/>
                 </a:solidFill>
               </a:rPr>
               <a:t>정리할 날짜</a:t>
@@ -8821,14 +9206,14 @@
       </p:sp>
       <p:sp>
         <p:nvSpPr>
-          <p:cNvPr id="16" name="TextBox 15"/>
+          <p:cNvPr id="18" name="TextBox 17"/>
           <p:cNvSpPr txBox="1"/>
           <p:nvPr/>
         </p:nvSpPr>
         <p:spPr>
           <a:xfrm>
-            <a:off x="8203996" y="3063240"/>
-            <a:ext cx="3210458" cy="2560320"/>
+            <a:off x="8203996" y="3246120"/>
+            <a:ext cx="3210458" cy="2148839"/>
           </a:xfrm>
           <a:prstGeom prst="rect">
             <a:avLst/>
@@ -8849,7 +9234,7 @@
             <a:r>
               <a:rPr sz="1500" b="0" i="0">
                 <a:solidFill>
-                  <a:srgbClr val="2B2B2B"/>
+                  <a:srgbClr val="26231F"/>
                 </a:solidFill>
               </a:rPr>
               <a:t>내용을 입력하세요</a:t>
@@ -8859,13 +9244,13 @@
       </p:sp>
       <p:sp>
         <p:nvSpPr>
-          <p:cNvPr id="17" name="안내 문구"/>
+          <p:cNvPr id="19" name="안내 문구"/>
           <p:cNvSpPr txBox="1"/>
           <p:nvPr/>
         </p:nvSpPr>
         <p:spPr>
           <a:xfrm>
-            <a:off x="640080" y="5852160"/>
+            <a:off x="640080" y="5623560"/>
             <a:ext cx="10911535" cy="548640"/>
           </a:xfrm>
           <a:prstGeom prst="rect">
@@ -8914,34 +9299,34 @@
         <a:sysClr val="window" lastClr="FFFFFF"/>
       </a:lt1>
       <a:dk2>
-        <a:srgbClr val="7C5D27"/>
+        <a:srgbClr val="493D27"/>
       </a:dk2>
       <a:lt2>
-        <a:srgbClr val="FAF6EF"/>
+        <a:srgbClr val="FBF6EC"/>
       </a:lt2>
       <a:accent1>
-        <a:srgbClr val="C49645"/>
+        <a:srgbClr val="E1C698"/>
       </a:accent1>
       <a:accent2>
-        <a:srgbClr val="3B8591"/>
+        <a:srgbClr val="E5EAB8"/>
       </a:accent2>
       <a:accent3>
-        <a:srgbClr val="7C5D27"/>
+        <a:srgbClr val="493D27"/>
       </a:accent3>
       <a:accent4>
-        <a:srgbClr val="F2E5CF"/>
+        <a:srgbClr val="F6EAD5"/>
       </a:accent4>
       <a:accent5>
-        <a:srgbClr val="808E6B"/>
+        <a:srgbClr val="E3D8A8"/>
       </a:accent5>
       <a:accent6>
-        <a:srgbClr val="B09E7D"/>
+        <a:srgbClr val="928B7D"/>
       </a:accent6>
       <a:hlink>
-        <a:srgbClr val="C49645"/>
+        <a:srgbClr val="E1C698"/>
       </a:hlink>
       <a:folHlink>
-        <a:srgbClr val="7C5D27"/>
+        <a:srgbClr val="493D27"/>
       </a:folHlink>
     </a:clrScheme>
     <a:fontScheme name="Office">
